--- a/Japan/Progress Presentation/Presentation 12.1.pptx
+++ b/Japan/Progress Presentation/Presentation 12.1.pptx
@@ -5,7 +5,7 @@
     <p:sldMasterId id="2147483648" r:id="rId1"/>
   </p:sldMasterIdLst>
   <p:notesMasterIdLst>
-    <p:notesMasterId r:id="rId11"/>
+    <p:notesMasterId r:id="rId15"/>
   </p:notesMasterIdLst>
   <p:sldIdLst>
     <p:sldId id="256" r:id="rId2"/>
@@ -16,23 +16,27 @@
     <p:sldId id="866" r:id="rId7"/>
     <p:sldId id="868" r:id="rId8"/>
     <p:sldId id="858" r:id="rId9"/>
-    <p:sldId id="267" r:id="rId10"/>
+    <p:sldId id="869" r:id="rId10"/>
+    <p:sldId id="870" r:id="rId11"/>
+    <p:sldId id="872" r:id="rId12"/>
+    <p:sldId id="871" r:id="rId13"/>
+    <p:sldId id="267" r:id="rId14"/>
   </p:sldIdLst>
   <p:sldSz cx="18288000" cy="10287000"/>
   <p:notesSz cx="6858000" cy="9144000"/>
   <p:embeddedFontLst>
     <p:embeddedFont>
       <p:font typeface="Cambria Math" panose="02040503050406030204" pitchFamily="18" charset="0"/>
-      <p:regular r:id="rId12"/>
+      <p:regular r:id="rId16"/>
     </p:embeddedFont>
     <p:embeddedFont>
       <p:font typeface="DM Serif Display" pitchFamily="2" charset="0"/>
-      <p:regular r:id="rId13"/>
-      <p:italic r:id="rId14"/>
+      <p:regular r:id="rId17"/>
+      <p:italic r:id="rId18"/>
     </p:embeddedFont>
     <p:embeddedFont>
       <p:font typeface="Open Sauce" panose="020B0604020202020204" charset="0"/>
-      <p:regular r:id="rId15"/>
+      <p:regular r:id="rId19"/>
     </p:embeddedFont>
   </p:embeddedFontLst>
   <p:defaultTextStyle>
@@ -231,7 +235,7 @@
           <a:p>
             <a:fld id="{4E2EF82B-E016-44BD-B0C4-D5A3DF34FAF9}" type="datetimeFigureOut">
               <a:rPr lang="en-US" smtClean="0"/>
-              <a:t>2/1/2026</a:t>
+              <a:t>2/16/2026</a:t>
             </a:fld>
             <a:endParaRPr lang="en-US"/>
           </a:p>
@@ -582,6 +586,222 @@
 </p:notes>
 </file>
 
+<file path=ppt/notesSlides/notesSlide10.xml><?xml version="1.0" encoding="utf-8"?>
+<p:notes xmlns:a="http://schemas.openxmlformats.org/drawingml/2006/main" xmlns:r="http://schemas.openxmlformats.org/officeDocument/2006/relationships" xmlns:p="http://schemas.openxmlformats.org/presentationml/2006/main">
+  <p:cSld>
+    <p:spTree>
+      <p:nvGrpSpPr>
+        <p:cNvPr id="1" name="">
+          <a:extLst>
+            <a:ext uri="{FF2B5EF4-FFF2-40B4-BE49-F238E27FC236}">
+              <a16:creationId xmlns:a16="http://schemas.microsoft.com/office/drawing/2014/main" id="{1999807D-7B43-0855-E2A9-B30CB29DF319}"/>
+            </a:ext>
+          </a:extLst>
+        </p:cNvPr>
+        <p:cNvGrpSpPr/>
+        <p:nvPr/>
+      </p:nvGrpSpPr>
+      <p:grpSpPr>
+        <a:xfrm>
+          <a:off x="0" y="0"/>
+          <a:ext cx="0" cy="0"/>
+          <a:chOff x="0" y="0"/>
+          <a:chExt cx="0" cy="0"/>
+        </a:xfrm>
+      </p:grpSpPr>
+      <p:sp>
+        <p:nvSpPr>
+          <p:cNvPr id="2" name="Slide Image Placeholder 1">
+            <a:extLst>
+              <a:ext uri="{FF2B5EF4-FFF2-40B4-BE49-F238E27FC236}">
+                <a16:creationId xmlns:a16="http://schemas.microsoft.com/office/drawing/2014/main" id="{E06B9480-4414-8AEE-670E-F475556AC94D}"/>
+              </a:ext>
+            </a:extLst>
+          </p:cNvPr>
+          <p:cNvSpPr>
+            <a:spLocks noGrp="1" noRot="1" noChangeAspect="1"/>
+          </p:cNvSpPr>
+          <p:nvPr>
+            <p:ph type="sldImg"/>
+          </p:nvPr>
+        </p:nvSpPr>
+        <p:spPr/>
+      </p:sp>
+      <p:sp>
+        <p:nvSpPr>
+          <p:cNvPr id="3" name="Notes Placeholder 2">
+            <a:extLst>
+              <a:ext uri="{FF2B5EF4-FFF2-40B4-BE49-F238E27FC236}">
+                <a16:creationId xmlns:a16="http://schemas.microsoft.com/office/drawing/2014/main" id="{7C7F9F29-F098-905C-6863-747207C1BC09}"/>
+              </a:ext>
+            </a:extLst>
+          </p:cNvPr>
+          <p:cNvSpPr>
+            <a:spLocks noGrp="1"/>
+          </p:cNvSpPr>
+          <p:nvPr>
+            <p:ph type="body" idx="1"/>
+          </p:nvPr>
+        </p:nvSpPr>
+        <p:spPr/>
+        <p:txBody>
+          <a:bodyPr/>
+          <a:lstStyle/>
+          <a:p>
+            <a:endParaRPr lang="en-US" dirty="0"/>
+          </a:p>
+        </p:txBody>
+      </p:sp>
+      <p:sp>
+        <p:nvSpPr>
+          <p:cNvPr id="4" name="Slide Number Placeholder 3">
+            <a:extLst>
+              <a:ext uri="{FF2B5EF4-FFF2-40B4-BE49-F238E27FC236}">
+                <a16:creationId xmlns:a16="http://schemas.microsoft.com/office/drawing/2014/main" id="{D7E9B06A-62D1-0F7E-3E25-3C32D58AC361}"/>
+              </a:ext>
+            </a:extLst>
+          </p:cNvPr>
+          <p:cNvSpPr>
+            <a:spLocks noGrp="1"/>
+          </p:cNvSpPr>
+          <p:nvPr>
+            <p:ph type="sldNum" sz="quarter" idx="5"/>
+          </p:nvPr>
+        </p:nvSpPr>
+        <p:spPr/>
+        <p:txBody>
+          <a:bodyPr/>
+          <a:lstStyle/>
+          <a:p>
+            <a:fld id="{7CA7D310-3A65-477A-971E-8091E55376EC}" type="slidenum">
+              <a:rPr lang="en-US" smtClean="0"/>
+              <a:t>11</a:t>
+            </a:fld>
+            <a:endParaRPr lang="en-US"/>
+          </a:p>
+        </p:txBody>
+      </p:sp>
+    </p:spTree>
+    <p:extLst>
+      <p:ext uri="{BB962C8B-B14F-4D97-AF65-F5344CB8AC3E}">
+        <p14:creationId xmlns:p14="http://schemas.microsoft.com/office/powerpoint/2010/main" val="3547772558"/>
+      </p:ext>
+    </p:extLst>
+  </p:cSld>
+  <p:clrMapOvr>
+    <a:masterClrMapping/>
+  </p:clrMapOvr>
+</p:notes>
+</file>
+
+<file path=ppt/notesSlides/notesSlide11.xml><?xml version="1.0" encoding="utf-8"?>
+<p:notes xmlns:a="http://schemas.openxmlformats.org/drawingml/2006/main" xmlns:r="http://schemas.openxmlformats.org/officeDocument/2006/relationships" xmlns:p="http://schemas.openxmlformats.org/presentationml/2006/main">
+  <p:cSld>
+    <p:spTree>
+      <p:nvGrpSpPr>
+        <p:cNvPr id="1" name="">
+          <a:extLst>
+            <a:ext uri="{FF2B5EF4-FFF2-40B4-BE49-F238E27FC236}">
+              <a16:creationId xmlns:a16="http://schemas.microsoft.com/office/drawing/2014/main" id="{B1B56002-A6FE-76F8-8CBC-DE02756F8C41}"/>
+            </a:ext>
+          </a:extLst>
+        </p:cNvPr>
+        <p:cNvGrpSpPr/>
+        <p:nvPr/>
+      </p:nvGrpSpPr>
+      <p:grpSpPr>
+        <a:xfrm>
+          <a:off x="0" y="0"/>
+          <a:ext cx="0" cy="0"/>
+          <a:chOff x="0" y="0"/>
+          <a:chExt cx="0" cy="0"/>
+        </a:xfrm>
+      </p:grpSpPr>
+      <p:sp>
+        <p:nvSpPr>
+          <p:cNvPr id="2" name="Slide Image Placeholder 1">
+            <a:extLst>
+              <a:ext uri="{FF2B5EF4-FFF2-40B4-BE49-F238E27FC236}">
+                <a16:creationId xmlns:a16="http://schemas.microsoft.com/office/drawing/2014/main" id="{A1BFABE6-F46E-AF1B-17A5-E99BE3739020}"/>
+              </a:ext>
+            </a:extLst>
+          </p:cNvPr>
+          <p:cNvSpPr>
+            <a:spLocks noGrp="1" noRot="1" noChangeAspect="1"/>
+          </p:cNvSpPr>
+          <p:nvPr>
+            <p:ph type="sldImg"/>
+          </p:nvPr>
+        </p:nvSpPr>
+        <p:spPr/>
+      </p:sp>
+      <p:sp>
+        <p:nvSpPr>
+          <p:cNvPr id="3" name="Notes Placeholder 2">
+            <a:extLst>
+              <a:ext uri="{FF2B5EF4-FFF2-40B4-BE49-F238E27FC236}">
+                <a16:creationId xmlns:a16="http://schemas.microsoft.com/office/drawing/2014/main" id="{1FBB3CFA-F14C-58F9-87AA-DAF62A55FE6D}"/>
+              </a:ext>
+            </a:extLst>
+          </p:cNvPr>
+          <p:cNvSpPr>
+            <a:spLocks noGrp="1"/>
+          </p:cNvSpPr>
+          <p:nvPr>
+            <p:ph type="body" idx="1"/>
+          </p:nvPr>
+        </p:nvSpPr>
+        <p:spPr/>
+        <p:txBody>
+          <a:bodyPr/>
+          <a:lstStyle/>
+          <a:p>
+            <a:endParaRPr lang="en-US" dirty="0"/>
+          </a:p>
+        </p:txBody>
+      </p:sp>
+      <p:sp>
+        <p:nvSpPr>
+          <p:cNvPr id="4" name="Slide Number Placeholder 3">
+            <a:extLst>
+              <a:ext uri="{FF2B5EF4-FFF2-40B4-BE49-F238E27FC236}">
+                <a16:creationId xmlns:a16="http://schemas.microsoft.com/office/drawing/2014/main" id="{52A16D03-ED1A-D35B-2D3E-CA80395AA549}"/>
+              </a:ext>
+            </a:extLst>
+          </p:cNvPr>
+          <p:cNvSpPr>
+            <a:spLocks noGrp="1"/>
+          </p:cNvSpPr>
+          <p:nvPr>
+            <p:ph type="sldNum" sz="quarter" idx="5"/>
+          </p:nvPr>
+        </p:nvSpPr>
+        <p:spPr/>
+        <p:txBody>
+          <a:bodyPr/>
+          <a:lstStyle/>
+          <a:p>
+            <a:fld id="{7CA7D310-3A65-477A-971E-8091E55376EC}" type="slidenum">
+              <a:rPr lang="en-US" smtClean="0"/>
+              <a:t>12</a:t>
+            </a:fld>
+            <a:endParaRPr lang="en-US"/>
+          </a:p>
+        </p:txBody>
+      </p:sp>
+    </p:spTree>
+    <p:extLst>
+      <p:ext uri="{BB962C8B-B14F-4D97-AF65-F5344CB8AC3E}">
+        <p14:creationId xmlns:p14="http://schemas.microsoft.com/office/powerpoint/2010/main" val="979141000"/>
+      </p:ext>
+    </p:extLst>
+  </p:cSld>
+  <p:clrMapOvr>
+    <a:masterClrMapping/>
+  </p:clrMapOvr>
+</p:notes>
+</file>
+
 <file path=ppt/notesSlides/notesSlide2.xml><?xml version="1.0" encoding="utf-8"?>
 <p:notes xmlns:a="http://schemas.openxmlformats.org/drawingml/2006/main" xmlns:r="http://schemas.openxmlformats.org/officeDocument/2006/relationships" xmlns:p="http://schemas.openxmlformats.org/presentationml/2006/main">
   <p:cSld>
@@ -1197,6 +1417,222 @@
     <p:extLst>
       <p:ext uri="{BB962C8B-B14F-4D97-AF65-F5344CB8AC3E}">
         <p14:creationId xmlns:p14="http://schemas.microsoft.com/office/powerpoint/2010/main" val="2180162664"/>
+      </p:ext>
+    </p:extLst>
+  </p:cSld>
+  <p:clrMapOvr>
+    <a:masterClrMapping/>
+  </p:clrMapOvr>
+</p:notes>
+</file>
+
+<file path=ppt/notesSlides/notesSlide8.xml><?xml version="1.0" encoding="utf-8"?>
+<p:notes xmlns:a="http://schemas.openxmlformats.org/drawingml/2006/main" xmlns:r="http://schemas.openxmlformats.org/officeDocument/2006/relationships" xmlns:p="http://schemas.openxmlformats.org/presentationml/2006/main">
+  <p:cSld>
+    <p:spTree>
+      <p:nvGrpSpPr>
+        <p:cNvPr id="1" name="">
+          <a:extLst>
+            <a:ext uri="{FF2B5EF4-FFF2-40B4-BE49-F238E27FC236}">
+              <a16:creationId xmlns:a16="http://schemas.microsoft.com/office/drawing/2014/main" id="{24162777-5A3E-D5AA-53DF-0A7F3B7D2BD6}"/>
+            </a:ext>
+          </a:extLst>
+        </p:cNvPr>
+        <p:cNvGrpSpPr/>
+        <p:nvPr/>
+      </p:nvGrpSpPr>
+      <p:grpSpPr>
+        <a:xfrm>
+          <a:off x="0" y="0"/>
+          <a:ext cx="0" cy="0"/>
+          <a:chOff x="0" y="0"/>
+          <a:chExt cx="0" cy="0"/>
+        </a:xfrm>
+      </p:grpSpPr>
+      <p:sp>
+        <p:nvSpPr>
+          <p:cNvPr id="2" name="Slide Image Placeholder 1">
+            <a:extLst>
+              <a:ext uri="{FF2B5EF4-FFF2-40B4-BE49-F238E27FC236}">
+                <a16:creationId xmlns:a16="http://schemas.microsoft.com/office/drawing/2014/main" id="{039642D6-EBC6-7D80-EC90-B204B9930FF3}"/>
+              </a:ext>
+            </a:extLst>
+          </p:cNvPr>
+          <p:cNvSpPr>
+            <a:spLocks noGrp="1" noRot="1" noChangeAspect="1"/>
+          </p:cNvSpPr>
+          <p:nvPr>
+            <p:ph type="sldImg"/>
+          </p:nvPr>
+        </p:nvSpPr>
+        <p:spPr/>
+      </p:sp>
+      <p:sp>
+        <p:nvSpPr>
+          <p:cNvPr id="3" name="Notes Placeholder 2">
+            <a:extLst>
+              <a:ext uri="{FF2B5EF4-FFF2-40B4-BE49-F238E27FC236}">
+                <a16:creationId xmlns:a16="http://schemas.microsoft.com/office/drawing/2014/main" id="{758350AF-D657-9613-38CE-46C32A9A6D31}"/>
+              </a:ext>
+            </a:extLst>
+          </p:cNvPr>
+          <p:cNvSpPr>
+            <a:spLocks noGrp="1"/>
+          </p:cNvSpPr>
+          <p:nvPr>
+            <p:ph type="body" idx="1"/>
+          </p:nvPr>
+        </p:nvSpPr>
+        <p:spPr/>
+        <p:txBody>
+          <a:bodyPr/>
+          <a:lstStyle/>
+          <a:p>
+            <a:endParaRPr lang="en-US" dirty="0"/>
+          </a:p>
+        </p:txBody>
+      </p:sp>
+      <p:sp>
+        <p:nvSpPr>
+          <p:cNvPr id="4" name="Slide Number Placeholder 3">
+            <a:extLst>
+              <a:ext uri="{FF2B5EF4-FFF2-40B4-BE49-F238E27FC236}">
+                <a16:creationId xmlns:a16="http://schemas.microsoft.com/office/drawing/2014/main" id="{F1097D87-69E2-0456-3559-9B38CF656ACE}"/>
+              </a:ext>
+            </a:extLst>
+          </p:cNvPr>
+          <p:cNvSpPr>
+            <a:spLocks noGrp="1"/>
+          </p:cNvSpPr>
+          <p:nvPr>
+            <p:ph type="sldNum" sz="quarter" idx="5"/>
+          </p:nvPr>
+        </p:nvSpPr>
+        <p:spPr/>
+        <p:txBody>
+          <a:bodyPr/>
+          <a:lstStyle/>
+          <a:p>
+            <a:fld id="{7CA7D310-3A65-477A-971E-8091E55376EC}" type="slidenum">
+              <a:rPr lang="en-US" smtClean="0"/>
+              <a:t>9</a:t>
+            </a:fld>
+            <a:endParaRPr lang="en-US"/>
+          </a:p>
+        </p:txBody>
+      </p:sp>
+    </p:spTree>
+    <p:extLst>
+      <p:ext uri="{BB962C8B-B14F-4D97-AF65-F5344CB8AC3E}">
+        <p14:creationId xmlns:p14="http://schemas.microsoft.com/office/powerpoint/2010/main" val="78426044"/>
+      </p:ext>
+    </p:extLst>
+  </p:cSld>
+  <p:clrMapOvr>
+    <a:masterClrMapping/>
+  </p:clrMapOvr>
+</p:notes>
+</file>
+
+<file path=ppt/notesSlides/notesSlide9.xml><?xml version="1.0" encoding="utf-8"?>
+<p:notes xmlns:a="http://schemas.openxmlformats.org/drawingml/2006/main" xmlns:r="http://schemas.openxmlformats.org/officeDocument/2006/relationships" xmlns:p="http://schemas.openxmlformats.org/presentationml/2006/main">
+  <p:cSld>
+    <p:spTree>
+      <p:nvGrpSpPr>
+        <p:cNvPr id="1" name="">
+          <a:extLst>
+            <a:ext uri="{FF2B5EF4-FFF2-40B4-BE49-F238E27FC236}">
+              <a16:creationId xmlns:a16="http://schemas.microsoft.com/office/drawing/2014/main" id="{7CDC1E13-9984-4D0D-38A0-59AFFB320086}"/>
+            </a:ext>
+          </a:extLst>
+        </p:cNvPr>
+        <p:cNvGrpSpPr/>
+        <p:nvPr/>
+      </p:nvGrpSpPr>
+      <p:grpSpPr>
+        <a:xfrm>
+          <a:off x="0" y="0"/>
+          <a:ext cx="0" cy="0"/>
+          <a:chOff x="0" y="0"/>
+          <a:chExt cx="0" cy="0"/>
+        </a:xfrm>
+      </p:grpSpPr>
+      <p:sp>
+        <p:nvSpPr>
+          <p:cNvPr id="2" name="Slide Image Placeholder 1">
+            <a:extLst>
+              <a:ext uri="{FF2B5EF4-FFF2-40B4-BE49-F238E27FC236}">
+                <a16:creationId xmlns:a16="http://schemas.microsoft.com/office/drawing/2014/main" id="{B10E596A-D449-9FAC-FB0E-EBBC752A3A60}"/>
+              </a:ext>
+            </a:extLst>
+          </p:cNvPr>
+          <p:cNvSpPr>
+            <a:spLocks noGrp="1" noRot="1" noChangeAspect="1"/>
+          </p:cNvSpPr>
+          <p:nvPr>
+            <p:ph type="sldImg"/>
+          </p:nvPr>
+        </p:nvSpPr>
+        <p:spPr/>
+      </p:sp>
+      <p:sp>
+        <p:nvSpPr>
+          <p:cNvPr id="3" name="Notes Placeholder 2">
+            <a:extLst>
+              <a:ext uri="{FF2B5EF4-FFF2-40B4-BE49-F238E27FC236}">
+                <a16:creationId xmlns:a16="http://schemas.microsoft.com/office/drawing/2014/main" id="{CE08E5DF-D859-45F6-67C3-25489372AF3E}"/>
+              </a:ext>
+            </a:extLst>
+          </p:cNvPr>
+          <p:cNvSpPr>
+            <a:spLocks noGrp="1"/>
+          </p:cNvSpPr>
+          <p:nvPr>
+            <p:ph type="body" idx="1"/>
+          </p:nvPr>
+        </p:nvSpPr>
+        <p:spPr/>
+        <p:txBody>
+          <a:bodyPr/>
+          <a:lstStyle/>
+          <a:p>
+            <a:endParaRPr lang="en-US" dirty="0"/>
+          </a:p>
+        </p:txBody>
+      </p:sp>
+      <p:sp>
+        <p:nvSpPr>
+          <p:cNvPr id="4" name="Slide Number Placeholder 3">
+            <a:extLst>
+              <a:ext uri="{FF2B5EF4-FFF2-40B4-BE49-F238E27FC236}">
+                <a16:creationId xmlns:a16="http://schemas.microsoft.com/office/drawing/2014/main" id="{97069862-AF7D-47D3-23B6-2FBD0A81030D}"/>
+              </a:ext>
+            </a:extLst>
+          </p:cNvPr>
+          <p:cNvSpPr>
+            <a:spLocks noGrp="1"/>
+          </p:cNvSpPr>
+          <p:nvPr>
+            <p:ph type="sldNum" sz="quarter" idx="5"/>
+          </p:nvPr>
+        </p:nvSpPr>
+        <p:spPr/>
+        <p:txBody>
+          <a:bodyPr/>
+          <a:lstStyle/>
+          <a:p>
+            <a:fld id="{7CA7D310-3A65-477A-971E-8091E55376EC}" type="slidenum">
+              <a:rPr lang="en-US" smtClean="0"/>
+              <a:t>10</a:t>
+            </a:fld>
+            <a:endParaRPr lang="en-US"/>
+          </a:p>
+        </p:txBody>
+      </p:sp>
+    </p:spTree>
+    <p:extLst>
+      <p:ext uri="{BB962C8B-B14F-4D97-AF65-F5344CB8AC3E}">
+        <p14:creationId xmlns:p14="http://schemas.microsoft.com/office/powerpoint/2010/main" val="4085941904"/>
       </p:ext>
     </p:extLst>
   </p:cSld>
@@ -1386,7 +1822,7 @@
             <a:fld id="{1D8BD707-D9CF-40AE-B4C6-C98DA3205C09}" type="datetimeFigureOut">
               <a:rPr lang="en-US" smtClean="0"/>
               <a:pPr/>
-              <a:t>2/1/2026</a:t>
+              <a:t>2/16/2026</a:t>
             </a:fld>
             <a:endParaRPr lang="en-US"/>
           </a:p>
@@ -1551,7 +1987,7 @@
             <a:fld id="{1D8BD707-D9CF-40AE-B4C6-C98DA3205C09}" type="datetimeFigureOut">
               <a:rPr lang="en-US" smtClean="0"/>
               <a:pPr/>
-              <a:t>2/1/2026</a:t>
+              <a:t>2/16/2026</a:t>
             </a:fld>
             <a:endParaRPr lang="en-US"/>
           </a:p>
@@ -1726,7 +2162,7 @@
             <a:fld id="{1D8BD707-D9CF-40AE-B4C6-C98DA3205C09}" type="datetimeFigureOut">
               <a:rPr lang="en-US" smtClean="0"/>
               <a:pPr/>
-              <a:t>2/1/2026</a:t>
+              <a:t>2/16/2026</a:t>
             </a:fld>
             <a:endParaRPr lang="en-US"/>
           </a:p>
@@ -1891,7 +2327,7 @@
             <a:fld id="{1D8BD707-D9CF-40AE-B4C6-C98DA3205C09}" type="datetimeFigureOut">
               <a:rPr lang="en-US" smtClean="0"/>
               <a:pPr/>
-              <a:t>2/1/2026</a:t>
+              <a:t>2/16/2026</a:t>
             </a:fld>
             <a:endParaRPr lang="en-US"/>
           </a:p>
@@ -2133,7 +2569,7 @@
             <a:fld id="{1D8BD707-D9CF-40AE-B4C6-C98DA3205C09}" type="datetimeFigureOut">
               <a:rPr lang="en-US" smtClean="0"/>
               <a:pPr/>
-              <a:t>2/1/2026</a:t>
+              <a:t>2/16/2026</a:t>
             </a:fld>
             <a:endParaRPr lang="en-US"/>
           </a:p>
@@ -2415,7 +2851,7 @@
             <a:fld id="{1D8BD707-D9CF-40AE-B4C6-C98DA3205C09}" type="datetimeFigureOut">
               <a:rPr lang="en-US" smtClean="0"/>
               <a:pPr/>
-              <a:t>2/1/2026</a:t>
+              <a:t>2/16/2026</a:t>
             </a:fld>
             <a:endParaRPr lang="en-US"/>
           </a:p>
@@ -2831,7 +3267,7 @@
             <a:fld id="{1D8BD707-D9CF-40AE-B4C6-C98DA3205C09}" type="datetimeFigureOut">
               <a:rPr lang="en-US" smtClean="0"/>
               <a:pPr/>
-              <a:t>2/1/2026</a:t>
+              <a:t>2/16/2026</a:t>
             </a:fld>
             <a:endParaRPr lang="en-US"/>
           </a:p>
@@ -2945,7 +3381,7 @@
             <a:fld id="{1D8BD707-D9CF-40AE-B4C6-C98DA3205C09}" type="datetimeFigureOut">
               <a:rPr lang="en-US" smtClean="0"/>
               <a:pPr/>
-              <a:t>2/1/2026</a:t>
+              <a:t>2/16/2026</a:t>
             </a:fld>
             <a:endParaRPr lang="en-US"/>
           </a:p>
@@ -3037,7 +3473,7 @@
             <a:fld id="{1D8BD707-D9CF-40AE-B4C6-C98DA3205C09}" type="datetimeFigureOut">
               <a:rPr lang="en-US" smtClean="0"/>
               <a:pPr/>
-              <a:t>2/1/2026</a:t>
+              <a:t>2/16/2026</a:t>
             </a:fld>
             <a:endParaRPr lang="en-US"/>
           </a:p>
@@ -3309,7 +3745,7 @@
             <a:fld id="{1D8BD707-D9CF-40AE-B4C6-C98DA3205C09}" type="datetimeFigureOut">
               <a:rPr lang="en-US" smtClean="0"/>
               <a:pPr/>
-              <a:t>2/1/2026</a:t>
+              <a:t>2/16/2026</a:t>
             </a:fld>
             <a:endParaRPr lang="en-US"/>
           </a:p>
@@ -3558,7 +3994,7 @@
             <a:fld id="{1D8BD707-D9CF-40AE-B4C6-C98DA3205C09}" type="datetimeFigureOut">
               <a:rPr lang="en-US" smtClean="0"/>
               <a:pPr/>
-              <a:t>2/1/2026</a:t>
+              <a:t>2/16/2026</a:t>
             </a:fld>
             <a:endParaRPr lang="en-US"/>
           </a:p>
@@ -3766,7 +4202,7 @@
             <a:fld id="{1D8BD707-D9CF-40AE-B4C6-C98DA3205C09}" type="datetimeFigureOut">
               <a:rPr lang="en-US" smtClean="0"/>
               <a:pPr/>
-              <a:t>2/1/2026</a:t>
+              <a:t>2/16/2026</a:t>
             </a:fld>
             <a:endParaRPr lang="en-US"/>
           </a:p>
@@ -4485,6 +4921,1235 @@
           </p:spPr>
         </p:pic>
       </p:grpSp>
+    </p:spTree>
+  </p:cSld>
+  <p:clrMapOvr>
+    <a:masterClrMapping/>
+  </p:clrMapOvr>
+</p:sld>
+</file>
+
+<file path=ppt/slides/slide10.xml><?xml version="1.0" encoding="utf-8"?>
+<p:sld xmlns:a="http://schemas.openxmlformats.org/drawingml/2006/main" xmlns:r="http://schemas.openxmlformats.org/officeDocument/2006/relationships" xmlns:p="http://schemas.openxmlformats.org/presentationml/2006/main">
+  <p:cSld>
+    <p:spTree>
+      <p:nvGrpSpPr>
+        <p:cNvPr id="1" name="">
+          <a:extLst>
+            <a:ext uri="{FF2B5EF4-FFF2-40B4-BE49-F238E27FC236}">
+              <a16:creationId xmlns:a16="http://schemas.microsoft.com/office/drawing/2014/main" id="{9FD191C8-5DA2-218D-DC0E-931CCFD52B23}"/>
+            </a:ext>
+          </a:extLst>
+        </p:cNvPr>
+        <p:cNvGrpSpPr/>
+        <p:nvPr/>
+      </p:nvGrpSpPr>
+      <p:grpSpPr>
+        <a:xfrm>
+          <a:off x="0" y="0"/>
+          <a:ext cx="0" cy="0"/>
+          <a:chOff x="0" y="0"/>
+          <a:chExt cx="0" cy="0"/>
+        </a:xfrm>
+      </p:grpSpPr>
+      <p:sp>
+        <p:nvSpPr>
+          <p:cNvPr id="2" name="Freeform 2">
+            <a:extLst>
+              <a:ext uri="{FF2B5EF4-FFF2-40B4-BE49-F238E27FC236}">
+                <a16:creationId xmlns:a16="http://schemas.microsoft.com/office/drawing/2014/main" id="{5CCB4A36-D36A-75A6-9767-2248B7BAF9BD}"/>
+              </a:ext>
+            </a:extLst>
+          </p:cNvPr>
+          <p:cNvSpPr/>
+          <p:nvPr/>
+        </p:nvSpPr>
+        <p:spPr>
+          <a:xfrm>
+            <a:off x="-1" y="0"/>
+            <a:ext cx="18288000" cy="10287000"/>
+          </a:xfrm>
+          <a:custGeom>
+            <a:avLst/>
+            <a:gdLst/>
+            <a:ahLst/>
+            <a:cxnLst/>
+            <a:rect l="l" t="t" r="r" b="b"/>
+            <a:pathLst>
+              <a:path w="18288000" h="10287000">
+                <a:moveTo>
+                  <a:pt x="0" y="0"/>
+                </a:moveTo>
+                <a:lnTo>
+                  <a:pt x="18288000" y="0"/>
+                </a:lnTo>
+                <a:lnTo>
+                  <a:pt x="18288000" y="10287000"/>
+                </a:lnTo>
+                <a:lnTo>
+                  <a:pt x="0" y="10287000"/>
+                </a:lnTo>
+                <a:lnTo>
+                  <a:pt x="0" y="0"/>
+                </a:lnTo>
+                <a:close/>
+              </a:path>
+            </a:pathLst>
+          </a:custGeom>
+          <a:blipFill>
+            <a:blip r:embed="rId3">
+              <a:alphaModFix amt="50000"/>
+            </a:blip>
+            <a:stretch>
+              <a:fillRect/>
+            </a:stretch>
+          </a:blipFill>
+          <a:ln cap="sq">
+            <a:noFill/>
+            <a:prstDash val="solid"/>
+            <a:miter/>
+          </a:ln>
+        </p:spPr>
+        <p:txBody>
+          <a:bodyPr/>
+          <a:lstStyle/>
+          <a:p>
+            <a:endParaRPr lang="en-US" dirty="0"/>
+          </a:p>
+        </p:txBody>
+      </p:sp>
+      <p:sp>
+        <p:nvSpPr>
+          <p:cNvPr id="3" name="AutoShape 3">
+            <a:extLst>
+              <a:ext uri="{FF2B5EF4-FFF2-40B4-BE49-F238E27FC236}">
+                <a16:creationId xmlns:a16="http://schemas.microsoft.com/office/drawing/2014/main" id="{2665A254-3AC2-7F9D-26A2-31D719B62C3B}"/>
+              </a:ext>
+            </a:extLst>
+          </p:cNvPr>
+          <p:cNvSpPr/>
+          <p:nvPr/>
+        </p:nvSpPr>
+        <p:spPr>
+          <a:xfrm>
+            <a:off x="1166399" y="1028700"/>
+            <a:ext cx="687324" cy="0"/>
+          </a:xfrm>
+          <a:prstGeom prst="line">
+            <a:avLst/>
+          </a:prstGeom>
+          <a:ln w="76200" cap="flat">
+            <a:solidFill>
+              <a:srgbClr val="000000"/>
+            </a:solidFill>
+            <a:prstDash val="solid"/>
+            <a:headEnd type="none" w="sm" len="sm"/>
+            <a:tailEnd type="none" w="sm" len="sm"/>
+          </a:ln>
+        </p:spPr>
+        <p:txBody>
+          <a:bodyPr/>
+          <a:lstStyle/>
+          <a:p>
+            <a:endParaRPr lang="en-US" dirty="0"/>
+          </a:p>
+        </p:txBody>
+      </p:sp>
+      <p:sp>
+        <p:nvSpPr>
+          <p:cNvPr id="8" name="TextBox 8">
+            <a:extLst>
+              <a:ext uri="{FF2B5EF4-FFF2-40B4-BE49-F238E27FC236}">
+                <a16:creationId xmlns:a16="http://schemas.microsoft.com/office/drawing/2014/main" id="{BB8BC515-D567-69B3-12B6-900A3A44C0FD}"/>
+              </a:ext>
+            </a:extLst>
+          </p:cNvPr>
+          <p:cNvSpPr txBox="1"/>
+          <p:nvPr/>
+        </p:nvSpPr>
+        <p:spPr>
+          <a:xfrm>
+            <a:off x="755816" y="2628122"/>
+            <a:ext cx="16541583" cy="7189019"/>
+          </a:xfrm>
+          <a:prstGeom prst="rect">
+            <a:avLst/>
+          </a:prstGeom>
+        </p:spPr>
+        <p:txBody>
+          <a:bodyPr wrap="square" lIns="0" tIns="0" rIns="0" bIns="0" rtlCol="0" anchor="t">
+            <a:spAutoFit/>
+          </a:bodyPr>
+          <a:lstStyle/>
+          <a:p>
+            <a:pPr marL="302259" lvl="1">
+              <a:lnSpc>
+                <a:spcPts val="4479"/>
+              </a:lnSpc>
+            </a:pPr>
+            <a:r>
+              <a:rPr lang="en-US" sz="3600" b="1" dirty="0">
+                <a:solidFill>
+                  <a:srgbClr val="000000"/>
+                </a:solidFill>
+                <a:latin typeface="Times New Roman" panose="02020603050405020304" pitchFamily="18" charset="0"/>
+                <a:cs typeface="Times New Roman" panose="02020603050405020304" pitchFamily="18" charset="0"/>
+                <a:sym typeface="Open Sauce"/>
+              </a:rPr>
+              <a:t>Optical Property-Based Selection of Human Bone Phantoms at 850 nm Using Integrating Sphere Measurements and the Inverse Adding-Doubling Method</a:t>
+            </a:r>
+            <a:r>
+              <a:rPr lang="en-US" sz="4000" b="1" dirty="0">
+                <a:solidFill>
+                  <a:srgbClr val="000000"/>
+                </a:solidFill>
+                <a:latin typeface="Times New Roman" panose="02020603050405020304" pitchFamily="18" charset="0"/>
+                <a:cs typeface="Times New Roman" panose="02020603050405020304" pitchFamily="18" charset="0"/>
+                <a:sym typeface="Open Sauce"/>
+              </a:rPr>
+              <a:t>. </a:t>
+            </a:r>
+            <a:endParaRPr lang="en-US" sz="2500" b="1" dirty="0"/>
+          </a:p>
+          <a:p>
+            <a:pPr marL="604519" lvl="1" indent="-302260">
+              <a:lnSpc>
+                <a:spcPct val="200000"/>
+              </a:lnSpc>
+              <a:buFont typeface="Arial"/>
+              <a:buChar char="•"/>
+            </a:pPr>
+            <a:r>
+              <a:rPr lang="en-US" sz="3200" b="1" dirty="0"/>
+              <a:t>Scopes</a:t>
+            </a:r>
+          </a:p>
+          <a:p>
+            <a:pPr marL="1061719" lvl="2" indent="-302260">
+              <a:lnSpc>
+                <a:spcPct val="200000"/>
+              </a:lnSpc>
+              <a:buFont typeface="Arial"/>
+              <a:buChar char="•"/>
+            </a:pPr>
+            <a:r>
+              <a:rPr lang="en-US" sz="2800" dirty="0"/>
+              <a:t>To study the optical characterization at a single wavelength of 850nm in the near-infrared NIR region</a:t>
+            </a:r>
+          </a:p>
+          <a:p>
+            <a:pPr marL="1061719" lvl="2" indent="-302260">
+              <a:lnSpc>
+                <a:spcPct val="200000"/>
+              </a:lnSpc>
+              <a:buFont typeface="Arial"/>
+              <a:buChar char="•"/>
+            </a:pPr>
+            <a:r>
+              <a:rPr lang="en-US" sz="2800" dirty="0"/>
+              <a:t>To perform optical measurements at steady-state.</a:t>
+            </a:r>
+          </a:p>
+          <a:p>
+            <a:pPr marL="1061719" lvl="2" indent="-302260">
+              <a:lnSpc>
+                <a:spcPct val="200000"/>
+              </a:lnSpc>
+              <a:buFont typeface="Arial"/>
+              <a:buChar char="•"/>
+            </a:pPr>
+            <a:r>
+              <a:rPr lang="en-US" sz="2800" dirty="0"/>
+              <a:t>To investigate the intrinsic optical parameters (Absorption coefficient and reduced scattering coefficient) of the bone phantom.</a:t>
+            </a:r>
+          </a:p>
+          <a:p>
+            <a:pPr marL="1061719" lvl="2" indent="-302260">
+              <a:lnSpc>
+                <a:spcPct val="200000"/>
+              </a:lnSpc>
+              <a:buFont typeface="Arial"/>
+              <a:buChar char="•"/>
+            </a:pPr>
+            <a:r>
+              <a:rPr lang="en-US" sz="2800" dirty="0"/>
+              <a:t>To measure the diffuse reflectance (R) and total transmittance (T) are measured using a single integrating sphere system.</a:t>
+            </a:r>
+          </a:p>
+        </p:txBody>
+      </p:sp>
+      <p:sp>
+        <p:nvSpPr>
+          <p:cNvPr id="4" name="TextBox 8">
+            <a:extLst>
+              <a:ext uri="{FF2B5EF4-FFF2-40B4-BE49-F238E27FC236}">
+                <a16:creationId xmlns:a16="http://schemas.microsoft.com/office/drawing/2014/main" id="{077DF103-38A1-D5EA-FB37-39FDE35B3560}"/>
+              </a:ext>
+            </a:extLst>
+          </p:cNvPr>
+          <p:cNvSpPr txBox="1"/>
+          <p:nvPr/>
+        </p:nvSpPr>
+        <p:spPr>
+          <a:xfrm>
+            <a:off x="7111200" y="1583943"/>
+            <a:ext cx="4065599" cy="613181"/>
+          </a:xfrm>
+          <a:prstGeom prst="rect">
+            <a:avLst/>
+          </a:prstGeom>
+        </p:spPr>
+        <p:txBody>
+          <a:bodyPr wrap="square" lIns="0" tIns="0" rIns="0" bIns="0" rtlCol="0" anchor="t">
+            <a:spAutoFit/>
+          </a:bodyPr>
+          <a:lstStyle/>
+          <a:p>
+            <a:pPr marL="302259" lvl="1">
+              <a:lnSpc>
+                <a:spcPts val="4479"/>
+              </a:lnSpc>
+            </a:pPr>
+            <a:r>
+              <a:rPr lang="en-US" sz="6000" b="1" dirty="0">
+                <a:solidFill>
+                  <a:srgbClr val="000000"/>
+                </a:solidFill>
+                <a:latin typeface="Times New Roman" panose="02020603050405020304" pitchFamily="18" charset="0"/>
+                <a:ea typeface="Open Sauce"/>
+                <a:cs typeface="Times New Roman" panose="02020603050405020304" pitchFamily="18" charset="0"/>
+                <a:sym typeface="Open Sauce"/>
+              </a:rPr>
+              <a:t>Thesis Title</a:t>
+            </a:r>
+          </a:p>
+        </p:txBody>
+      </p:sp>
+    </p:spTree>
+    <p:extLst>
+      <p:ext uri="{BB962C8B-B14F-4D97-AF65-F5344CB8AC3E}">
+        <p14:creationId xmlns:p14="http://schemas.microsoft.com/office/powerpoint/2010/main" val="1063783782"/>
+      </p:ext>
+    </p:extLst>
+  </p:cSld>
+  <p:clrMapOvr>
+    <a:masterClrMapping/>
+  </p:clrMapOvr>
+</p:sld>
+</file>
+
+<file path=ppt/slides/slide11.xml><?xml version="1.0" encoding="utf-8"?>
+<p:sld xmlns:a="http://schemas.openxmlformats.org/drawingml/2006/main" xmlns:r="http://schemas.openxmlformats.org/officeDocument/2006/relationships" xmlns:p="http://schemas.openxmlformats.org/presentationml/2006/main">
+  <p:cSld>
+    <p:spTree>
+      <p:nvGrpSpPr>
+        <p:cNvPr id="1" name="">
+          <a:extLst>
+            <a:ext uri="{FF2B5EF4-FFF2-40B4-BE49-F238E27FC236}">
+              <a16:creationId xmlns:a16="http://schemas.microsoft.com/office/drawing/2014/main" id="{1FCD7030-68CD-7816-4CEC-32BC528F2BE4}"/>
+            </a:ext>
+          </a:extLst>
+        </p:cNvPr>
+        <p:cNvGrpSpPr/>
+        <p:nvPr/>
+      </p:nvGrpSpPr>
+      <p:grpSpPr>
+        <a:xfrm>
+          <a:off x="0" y="0"/>
+          <a:ext cx="0" cy="0"/>
+          <a:chOff x="0" y="0"/>
+          <a:chExt cx="0" cy="0"/>
+        </a:xfrm>
+      </p:grpSpPr>
+      <p:sp>
+        <p:nvSpPr>
+          <p:cNvPr id="2" name="Freeform 2">
+            <a:extLst>
+              <a:ext uri="{FF2B5EF4-FFF2-40B4-BE49-F238E27FC236}">
+                <a16:creationId xmlns:a16="http://schemas.microsoft.com/office/drawing/2014/main" id="{DFEF5BF6-DA8C-8A86-A818-1CE881668CA6}"/>
+              </a:ext>
+            </a:extLst>
+          </p:cNvPr>
+          <p:cNvSpPr/>
+          <p:nvPr/>
+        </p:nvSpPr>
+        <p:spPr>
+          <a:xfrm>
+            <a:off x="-1" y="0"/>
+            <a:ext cx="18288000" cy="10287000"/>
+          </a:xfrm>
+          <a:custGeom>
+            <a:avLst/>
+            <a:gdLst/>
+            <a:ahLst/>
+            <a:cxnLst/>
+            <a:rect l="l" t="t" r="r" b="b"/>
+            <a:pathLst>
+              <a:path w="18288000" h="10287000">
+                <a:moveTo>
+                  <a:pt x="0" y="0"/>
+                </a:moveTo>
+                <a:lnTo>
+                  <a:pt x="18288000" y="0"/>
+                </a:lnTo>
+                <a:lnTo>
+                  <a:pt x="18288000" y="10287000"/>
+                </a:lnTo>
+                <a:lnTo>
+                  <a:pt x="0" y="10287000"/>
+                </a:lnTo>
+                <a:lnTo>
+                  <a:pt x="0" y="0"/>
+                </a:lnTo>
+                <a:close/>
+              </a:path>
+            </a:pathLst>
+          </a:custGeom>
+          <a:blipFill>
+            <a:blip r:embed="rId3">
+              <a:alphaModFix amt="50000"/>
+            </a:blip>
+            <a:stretch>
+              <a:fillRect/>
+            </a:stretch>
+          </a:blipFill>
+          <a:ln cap="sq">
+            <a:noFill/>
+            <a:prstDash val="solid"/>
+            <a:miter/>
+          </a:ln>
+        </p:spPr>
+        <p:txBody>
+          <a:bodyPr/>
+          <a:lstStyle/>
+          <a:p>
+            <a:endParaRPr lang="en-US" dirty="0"/>
+          </a:p>
+        </p:txBody>
+      </p:sp>
+      <p:sp>
+        <p:nvSpPr>
+          <p:cNvPr id="3" name="AutoShape 3">
+            <a:extLst>
+              <a:ext uri="{FF2B5EF4-FFF2-40B4-BE49-F238E27FC236}">
+                <a16:creationId xmlns:a16="http://schemas.microsoft.com/office/drawing/2014/main" id="{3BA7F8CA-5CB7-8D58-D793-1FA0254A4B09}"/>
+              </a:ext>
+            </a:extLst>
+          </p:cNvPr>
+          <p:cNvSpPr/>
+          <p:nvPr/>
+        </p:nvSpPr>
+        <p:spPr>
+          <a:xfrm>
+            <a:off x="1166399" y="1028700"/>
+            <a:ext cx="687324" cy="0"/>
+          </a:xfrm>
+          <a:prstGeom prst="line">
+            <a:avLst/>
+          </a:prstGeom>
+          <a:ln w="76200" cap="flat">
+            <a:solidFill>
+              <a:srgbClr val="000000"/>
+            </a:solidFill>
+            <a:prstDash val="solid"/>
+            <a:headEnd type="none" w="sm" len="sm"/>
+            <a:tailEnd type="none" w="sm" len="sm"/>
+          </a:ln>
+        </p:spPr>
+        <p:txBody>
+          <a:bodyPr/>
+          <a:lstStyle/>
+          <a:p>
+            <a:endParaRPr lang="en-US" dirty="0"/>
+          </a:p>
+        </p:txBody>
+      </p:sp>
+      <p:sp>
+        <p:nvSpPr>
+          <p:cNvPr id="8" name="TextBox 8">
+            <a:extLst>
+              <a:ext uri="{FF2B5EF4-FFF2-40B4-BE49-F238E27FC236}">
+                <a16:creationId xmlns:a16="http://schemas.microsoft.com/office/drawing/2014/main" id="{323BA306-FB95-33DA-C5A0-DACFCE1A4C1E}"/>
+              </a:ext>
+            </a:extLst>
+          </p:cNvPr>
+          <p:cNvSpPr txBox="1"/>
+          <p:nvPr/>
+        </p:nvSpPr>
+        <p:spPr>
+          <a:xfrm>
+            <a:off x="755816" y="2628122"/>
+            <a:ext cx="16541583" cy="7189019"/>
+          </a:xfrm>
+          <a:prstGeom prst="rect">
+            <a:avLst/>
+          </a:prstGeom>
+        </p:spPr>
+        <p:txBody>
+          <a:bodyPr wrap="square" lIns="0" tIns="0" rIns="0" bIns="0" rtlCol="0" anchor="t">
+            <a:spAutoFit/>
+          </a:bodyPr>
+          <a:lstStyle/>
+          <a:p>
+            <a:pPr marL="302259" lvl="1">
+              <a:lnSpc>
+                <a:spcPts val="4479"/>
+              </a:lnSpc>
+            </a:pPr>
+            <a:r>
+              <a:rPr lang="en-US" sz="3600" b="1" dirty="0">
+                <a:solidFill>
+                  <a:srgbClr val="000000"/>
+                </a:solidFill>
+                <a:latin typeface="Times New Roman" panose="02020603050405020304" pitchFamily="18" charset="0"/>
+                <a:cs typeface="Times New Roman" panose="02020603050405020304" pitchFamily="18" charset="0"/>
+                <a:sym typeface="Open Sauce"/>
+              </a:rPr>
+              <a:t>Optical Property-Based Selection of Human Bone Phantoms at 850 nm Using Integrating Sphere Measurements and the Inverse Adding-Doubling Method</a:t>
+            </a:r>
+            <a:r>
+              <a:rPr lang="en-US" sz="4000" b="1" dirty="0">
+                <a:solidFill>
+                  <a:srgbClr val="000000"/>
+                </a:solidFill>
+                <a:latin typeface="Times New Roman" panose="02020603050405020304" pitchFamily="18" charset="0"/>
+                <a:cs typeface="Times New Roman" panose="02020603050405020304" pitchFamily="18" charset="0"/>
+                <a:sym typeface="Open Sauce"/>
+              </a:rPr>
+              <a:t>. </a:t>
+            </a:r>
+            <a:endParaRPr lang="en-US" sz="2500" b="1" dirty="0"/>
+          </a:p>
+          <a:p>
+            <a:pPr marL="604519" lvl="1" indent="-302260">
+              <a:lnSpc>
+                <a:spcPct val="200000"/>
+              </a:lnSpc>
+              <a:buFont typeface="Arial"/>
+              <a:buChar char="•"/>
+            </a:pPr>
+            <a:r>
+              <a:rPr lang="en-US" sz="3200" b="1" dirty="0"/>
+              <a:t>Scopes</a:t>
+            </a:r>
+          </a:p>
+          <a:p>
+            <a:pPr marL="1061719" lvl="2" indent="-302260">
+              <a:lnSpc>
+                <a:spcPct val="200000"/>
+              </a:lnSpc>
+              <a:buFont typeface="Arial"/>
+              <a:buChar char="•"/>
+            </a:pPr>
+            <a:r>
+              <a:rPr lang="en-US" sz="2800" dirty="0"/>
+              <a:t>To Calibrate the optical measurement system using the reference standards. </a:t>
+            </a:r>
+          </a:p>
+          <a:p>
+            <a:pPr marL="1061719" lvl="2" indent="-302260">
+              <a:lnSpc>
+                <a:spcPct val="200000"/>
+              </a:lnSpc>
+              <a:buFont typeface="Arial"/>
+              <a:buChar char="•"/>
+            </a:pPr>
+            <a:r>
+              <a:rPr lang="en-US" sz="2800" dirty="0"/>
+              <a:t>To perform the background and dark signal correction for the detector. </a:t>
+            </a:r>
+          </a:p>
+          <a:p>
+            <a:pPr marL="1061719" lvl="2" indent="-302260">
+              <a:lnSpc>
+                <a:spcPct val="200000"/>
+              </a:lnSpc>
+              <a:buFont typeface="Arial"/>
+              <a:buChar char="•"/>
+            </a:pPr>
+            <a:r>
+              <a:rPr lang="en-US" sz="2800" dirty="0"/>
+              <a:t>To perform measurement on the thickness-controlled phantom samples. </a:t>
+            </a:r>
+          </a:p>
+          <a:p>
+            <a:pPr marL="1061719" lvl="2" indent="-302260">
+              <a:lnSpc>
+                <a:spcPct val="200000"/>
+              </a:lnSpc>
+              <a:buFont typeface="Arial"/>
+              <a:buChar char="•"/>
+            </a:pPr>
+            <a:r>
+              <a:rPr lang="en-US" sz="2800" dirty="0"/>
+              <a:t>To compare the intrinsic optical properties of bone tissue phantoms with published human bone studies values. </a:t>
+            </a:r>
+          </a:p>
+          <a:p>
+            <a:pPr marL="1061719" lvl="2" indent="-302260">
+              <a:lnSpc>
+                <a:spcPct val="200000"/>
+              </a:lnSpc>
+              <a:buFont typeface="Arial"/>
+              <a:buChar char="•"/>
+            </a:pPr>
+            <a:r>
+              <a:rPr lang="en-US" sz="2800" dirty="0"/>
+              <a:t>To select the suitable PDMS-based bone phantoms for the human bone optical studies. </a:t>
+            </a:r>
+          </a:p>
+        </p:txBody>
+      </p:sp>
+      <p:sp>
+        <p:nvSpPr>
+          <p:cNvPr id="4" name="TextBox 8">
+            <a:extLst>
+              <a:ext uri="{FF2B5EF4-FFF2-40B4-BE49-F238E27FC236}">
+                <a16:creationId xmlns:a16="http://schemas.microsoft.com/office/drawing/2014/main" id="{10CDB601-307F-9D07-A163-3DAB72490141}"/>
+              </a:ext>
+            </a:extLst>
+          </p:cNvPr>
+          <p:cNvSpPr txBox="1"/>
+          <p:nvPr/>
+        </p:nvSpPr>
+        <p:spPr>
+          <a:xfrm>
+            <a:off x="7111200" y="1583943"/>
+            <a:ext cx="4065599" cy="613181"/>
+          </a:xfrm>
+          <a:prstGeom prst="rect">
+            <a:avLst/>
+          </a:prstGeom>
+        </p:spPr>
+        <p:txBody>
+          <a:bodyPr wrap="square" lIns="0" tIns="0" rIns="0" bIns="0" rtlCol="0" anchor="t">
+            <a:spAutoFit/>
+          </a:bodyPr>
+          <a:lstStyle/>
+          <a:p>
+            <a:pPr marL="302259" lvl="1">
+              <a:lnSpc>
+                <a:spcPts val="4479"/>
+              </a:lnSpc>
+            </a:pPr>
+            <a:r>
+              <a:rPr lang="en-US" sz="6000" b="1" dirty="0">
+                <a:solidFill>
+                  <a:srgbClr val="000000"/>
+                </a:solidFill>
+                <a:latin typeface="Times New Roman" panose="02020603050405020304" pitchFamily="18" charset="0"/>
+                <a:ea typeface="Open Sauce"/>
+                <a:cs typeface="Times New Roman" panose="02020603050405020304" pitchFamily="18" charset="0"/>
+                <a:sym typeface="Open Sauce"/>
+              </a:rPr>
+              <a:t>Thesis Title</a:t>
+            </a:r>
+          </a:p>
+        </p:txBody>
+      </p:sp>
+    </p:spTree>
+    <p:extLst>
+      <p:ext uri="{BB962C8B-B14F-4D97-AF65-F5344CB8AC3E}">
+        <p14:creationId xmlns:p14="http://schemas.microsoft.com/office/powerpoint/2010/main" val="1976722625"/>
+      </p:ext>
+    </p:extLst>
+  </p:cSld>
+  <p:clrMapOvr>
+    <a:masterClrMapping/>
+  </p:clrMapOvr>
+</p:sld>
+</file>
+
+<file path=ppt/slides/slide12.xml><?xml version="1.0" encoding="utf-8"?>
+<p:sld xmlns:a="http://schemas.openxmlformats.org/drawingml/2006/main" xmlns:r="http://schemas.openxmlformats.org/officeDocument/2006/relationships" xmlns:p="http://schemas.openxmlformats.org/presentationml/2006/main">
+  <p:cSld>
+    <p:spTree>
+      <p:nvGrpSpPr>
+        <p:cNvPr id="1" name="">
+          <a:extLst>
+            <a:ext uri="{FF2B5EF4-FFF2-40B4-BE49-F238E27FC236}">
+              <a16:creationId xmlns:a16="http://schemas.microsoft.com/office/drawing/2014/main" id="{D9500B97-E0DB-0B73-3C93-730F72D4B4C3}"/>
+            </a:ext>
+          </a:extLst>
+        </p:cNvPr>
+        <p:cNvGrpSpPr/>
+        <p:nvPr/>
+      </p:nvGrpSpPr>
+      <p:grpSpPr>
+        <a:xfrm>
+          <a:off x="0" y="0"/>
+          <a:ext cx="0" cy="0"/>
+          <a:chOff x="0" y="0"/>
+          <a:chExt cx="0" cy="0"/>
+        </a:xfrm>
+      </p:grpSpPr>
+      <p:sp>
+        <p:nvSpPr>
+          <p:cNvPr id="2" name="Freeform 2">
+            <a:extLst>
+              <a:ext uri="{FF2B5EF4-FFF2-40B4-BE49-F238E27FC236}">
+                <a16:creationId xmlns:a16="http://schemas.microsoft.com/office/drawing/2014/main" id="{60DD7DCC-DD50-0BFB-D0C9-F0F1204C2451}"/>
+              </a:ext>
+            </a:extLst>
+          </p:cNvPr>
+          <p:cNvSpPr/>
+          <p:nvPr/>
+        </p:nvSpPr>
+        <p:spPr>
+          <a:xfrm>
+            <a:off x="-1" y="0"/>
+            <a:ext cx="18288000" cy="10287000"/>
+          </a:xfrm>
+          <a:custGeom>
+            <a:avLst/>
+            <a:gdLst/>
+            <a:ahLst/>
+            <a:cxnLst/>
+            <a:rect l="l" t="t" r="r" b="b"/>
+            <a:pathLst>
+              <a:path w="18288000" h="10287000">
+                <a:moveTo>
+                  <a:pt x="0" y="0"/>
+                </a:moveTo>
+                <a:lnTo>
+                  <a:pt x="18288000" y="0"/>
+                </a:lnTo>
+                <a:lnTo>
+                  <a:pt x="18288000" y="10287000"/>
+                </a:lnTo>
+                <a:lnTo>
+                  <a:pt x="0" y="10287000"/>
+                </a:lnTo>
+                <a:lnTo>
+                  <a:pt x="0" y="0"/>
+                </a:lnTo>
+                <a:close/>
+              </a:path>
+            </a:pathLst>
+          </a:custGeom>
+          <a:blipFill>
+            <a:blip r:embed="rId3">
+              <a:alphaModFix amt="50000"/>
+            </a:blip>
+            <a:stretch>
+              <a:fillRect/>
+            </a:stretch>
+          </a:blipFill>
+          <a:ln cap="sq">
+            <a:noFill/>
+            <a:prstDash val="solid"/>
+            <a:miter/>
+          </a:ln>
+        </p:spPr>
+        <p:txBody>
+          <a:bodyPr/>
+          <a:lstStyle/>
+          <a:p>
+            <a:endParaRPr lang="en-US" dirty="0"/>
+          </a:p>
+        </p:txBody>
+      </p:sp>
+      <p:sp>
+        <p:nvSpPr>
+          <p:cNvPr id="3" name="AutoShape 3">
+            <a:extLst>
+              <a:ext uri="{FF2B5EF4-FFF2-40B4-BE49-F238E27FC236}">
+                <a16:creationId xmlns:a16="http://schemas.microsoft.com/office/drawing/2014/main" id="{9A34592B-F6B0-671D-2BB6-DB6742C0D5BD}"/>
+              </a:ext>
+            </a:extLst>
+          </p:cNvPr>
+          <p:cNvSpPr/>
+          <p:nvPr/>
+        </p:nvSpPr>
+        <p:spPr>
+          <a:xfrm>
+            <a:off x="1166399" y="1028700"/>
+            <a:ext cx="687324" cy="0"/>
+          </a:xfrm>
+          <a:prstGeom prst="line">
+            <a:avLst/>
+          </a:prstGeom>
+          <a:ln w="76200" cap="flat">
+            <a:solidFill>
+              <a:srgbClr val="000000"/>
+            </a:solidFill>
+            <a:prstDash val="solid"/>
+            <a:headEnd type="none" w="sm" len="sm"/>
+            <a:tailEnd type="none" w="sm" len="sm"/>
+          </a:ln>
+        </p:spPr>
+        <p:txBody>
+          <a:bodyPr/>
+          <a:lstStyle/>
+          <a:p>
+            <a:endParaRPr lang="en-US" dirty="0"/>
+          </a:p>
+        </p:txBody>
+      </p:sp>
+      <p:sp>
+        <p:nvSpPr>
+          <p:cNvPr id="8" name="TextBox 8">
+            <a:extLst>
+              <a:ext uri="{FF2B5EF4-FFF2-40B4-BE49-F238E27FC236}">
+                <a16:creationId xmlns:a16="http://schemas.microsoft.com/office/drawing/2014/main" id="{97EA3B4C-991D-1DE7-98D0-72CA325613C9}"/>
+              </a:ext>
+            </a:extLst>
+          </p:cNvPr>
+          <p:cNvSpPr txBox="1"/>
+          <p:nvPr/>
+        </p:nvSpPr>
+        <p:spPr>
+          <a:xfrm>
+            <a:off x="755816" y="2628122"/>
+            <a:ext cx="16541583" cy="7242880"/>
+          </a:xfrm>
+          <a:prstGeom prst="rect">
+            <a:avLst/>
+          </a:prstGeom>
+        </p:spPr>
+        <p:txBody>
+          <a:bodyPr wrap="square" lIns="0" tIns="0" rIns="0" bIns="0" rtlCol="0" anchor="t">
+            <a:spAutoFit/>
+          </a:bodyPr>
+          <a:lstStyle/>
+          <a:p>
+            <a:pPr marL="302259" lvl="1">
+              <a:lnSpc>
+                <a:spcPts val="4479"/>
+              </a:lnSpc>
+            </a:pPr>
+            <a:r>
+              <a:rPr lang="en-US" sz="3600" b="1" dirty="0">
+                <a:solidFill>
+                  <a:srgbClr val="000000"/>
+                </a:solidFill>
+                <a:latin typeface="Times New Roman" panose="02020603050405020304" pitchFamily="18" charset="0"/>
+                <a:cs typeface="Times New Roman" panose="02020603050405020304" pitchFamily="18" charset="0"/>
+                <a:sym typeface="Open Sauce"/>
+              </a:rPr>
+              <a:t>Optical Property-Based Selection of Human Bone Phantoms at 850 nm Using Integrating Sphere Measurements and the Inverse Adding-Doubling Method</a:t>
+            </a:r>
+            <a:r>
+              <a:rPr lang="en-US" sz="4000" b="1" dirty="0">
+                <a:solidFill>
+                  <a:srgbClr val="000000"/>
+                </a:solidFill>
+                <a:latin typeface="Times New Roman" panose="02020603050405020304" pitchFamily="18" charset="0"/>
+                <a:cs typeface="Times New Roman" panose="02020603050405020304" pitchFamily="18" charset="0"/>
+                <a:sym typeface="Open Sauce"/>
+              </a:rPr>
+              <a:t>. </a:t>
+            </a:r>
+            <a:endParaRPr lang="en-US" sz="2500" b="1" dirty="0"/>
+          </a:p>
+          <a:p>
+            <a:pPr marL="604519" lvl="1" indent="-302260">
+              <a:lnSpc>
+                <a:spcPct val="200000"/>
+              </a:lnSpc>
+              <a:buFont typeface="Arial"/>
+              <a:buChar char="•"/>
+            </a:pPr>
+            <a:r>
+              <a:rPr lang="en-US" sz="3200" b="1" dirty="0"/>
+              <a:t>Significance of the Study</a:t>
+            </a:r>
+          </a:p>
+          <a:p>
+            <a:pPr marL="1061719" lvl="2" indent="-302260">
+              <a:lnSpc>
+                <a:spcPct val="150000"/>
+              </a:lnSpc>
+              <a:buFont typeface="Arial"/>
+              <a:buChar char="•"/>
+            </a:pPr>
+            <a:r>
+              <a:rPr lang="en-US" sz="2800" b="1" dirty="0"/>
+              <a:t>Improves the reliability of bone phantom selection</a:t>
+            </a:r>
+            <a:r>
+              <a:rPr lang="en-US" sz="2800" dirty="0"/>
+              <a:t> through quantitative optical-property matching rather than assumption-based design approaches. </a:t>
+            </a:r>
+          </a:p>
+          <a:p>
+            <a:pPr marL="1061719" lvl="2" indent="-302260">
+              <a:lnSpc>
+                <a:spcPct val="150000"/>
+              </a:lnSpc>
+              <a:buFont typeface="Arial"/>
+              <a:buChar char="•"/>
+            </a:pPr>
+            <a:r>
+              <a:rPr lang="en-US" sz="2800" b="1" dirty="0"/>
+              <a:t>Enables the development of optically equivalent PDMS-based bone phantoms</a:t>
+            </a:r>
+            <a:r>
+              <a:rPr lang="en-US" sz="2800" dirty="0"/>
+              <a:t> for controlled biomedical optical experiments at 850 nm.</a:t>
+            </a:r>
+          </a:p>
+          <a:p>
+            <a:pPr marL="1061719" lvl="2" indent="-302260">
+              <a:lnSpc>
+                <a:spcPct val="150000"/>
+              </a:lnSpc>
+              <a:buFont typeface="Arial"/>
+              <a:buChar char="•"/>
+            </a:pPr>
+            <a:r>
+              <a:rPr lang="en-US" sz="2800" dirty="0"/>
+              <a:t> </a:t>
+            </a:r>
+            <a:r>
+              <a:rPr lang="en-US" sz="2800" b="1" dirty="0"/>
+              <a:t>Provides reusable, stable, and tunable phantom materials</a:t>
+            </a:r>
+            <a:r>
+              <a:rPr lang="en-US" sz="2800" dirty="0"/>
+              <a:t>, ensuring consistent experimental conditions and repeatability. </a:t>
+            </a:r>
+          </a:p>
+          <a:p>
+            <a:pPr marL="1061719" lvl="2" indent="-302260">
+              <a:lnSpc>
+                <a:spcPct val="150000"/>
+              </a:lnSpc>
+              <a:buFont typeface="Arial"/>
+              <a:buChar char="•"/>
+            </a:pPr>
+            <a:r>
+              <a:rPr lang="en-US" sz="2800" b="1" dirty="0"/>
+              <a:t>Reduces dependence on real human bone samples</a:t>
+            </a:r>
+            <a:r>
+              <a:rPr lang="en-US" sz="2800" dirty="0"/>
+              <a:t>, supporting ethical research practices and improving experimental accessibility.</a:t>
+            </a:r>
+            <a:endParaRPr lang="en-US" sz="2500" dirty="0"/>
+          </a:p>
+        </p:txBody>
+      </p:sp>
+      <p:sp>
+        <p:nvSpPr>
+          <p:cNvPr id="4" name="TextBox 8">
+            <a:extLst>
+              <a:ext uri="{FF2B5EF4-FFF2-40B4-BE49-F238E27FC236}">
+                <a16:creationId xmlns:a16="http://schemas.microsoft.com/office/drawing/2014/main" id="{E744DC86-A1AB-8BA8-F529-34F490052E9D}"/>
+              </a:ext>
+            </a:extLst>
+          </p:cNvPr>
+          <p:cNvSpPr txBox="1"/>
+          <p:nvPr/>
+        </p:nvSpPr>
+        <p:spPr>
+          <a:xfrm>
+            <a:off x="7111200" y="1583943"/>
+            <a:ext cx="4065599" cy="613181"/>
+          </a:xfrm>
+          <a:prstGeom prst="rect">
+            <a:avLst/>
+          </a:prstGeom>
+        </p:spPr>
+        <p:txBody>
+          <a:bodyPr wrap="square" lIns="0" tIns="0" rIns="0" bIns="0" rtlCol="0" anchor="t">
+            <a:spAutoFit/>
+          </a:bodyPr>
+          <a:lstStyle/>
+          <a:p>
+            <a:pPr marL="302259" lvl="1">
+              <a:lnSpc>
+                <a:spcPts val="4479"/>
+              </a:lnSpc>
+            </a:pPr>
+            <a:r>
+              <a:rPr lang="en-US" sz="6000" b="1" dirty="0">
+                <a:solidFill>
+                  <a:srgbClr val="000000"/>
+                </a:solidFill>
+                <a:latin typeface="Times New Roman" panose="02020603050405020304" pitchFamily="18" charset="0"/>
+                <a:ea typeface="Open Sauce"/>
+                <a:cs typeface="Times New Roman" panose="02020603050405020304" pitchFamily="18" charset="0"/>
+                <a:sym typeface="Open Sauce"/>
+              </a:rPr>
+              <a:t>Thesis Title</a:t>
+            </a:r>
+          </a:p>
+        </p:txBody>
+      </p:sp>
+    </p:spTree>
+    <p:extLst>
+      <p:ext uri="{BB962C8B-B14F-4D97-AF65-F5344CB8AC3E}">
+        <p14:creationId xmlns:p14="http://schemas.microsoft.com/office/powerpoint/2010/main" val="560711209"/>
+      </p:ext>
+    </p:extLst>
+  </p:cSld>
+  <p:clrMapOvr>
+    <a:masterClrMapping/>
+  </p:clrMapOvr>
+</p:sld>
+</file>
+
+<file path=ppt/slides/slide13.xml><?xml version="1.0" encoding="utf-8"?>
+<p:sld xmlns:a="http://schemas.openxmlformats.org/drawingml/2006/main" xmlns:r="http://schemas.openxmlformats.org/officeDocument/2006/relationships" xmlns:p="http://schemas.openxmlformats.org/presentationml/2006/main">
+  <p:cSld>
+    <p:spTree>
+      <p:nvGrpSpPr>
+        <p:cNvPr id="1" name=""/>
+        <p:cNvGrpSpPr/>
+        <p:nvPr/>
+      </p:nvGrpSpPr>
+      <p:grpSpPr>
+        <a:xfrm>
+          <a:off x="0" y="0"/>
+          <a:ext cx="0" cy="0"/>
+          <a:chOff x="0" y="0"/>
+          <a:chExt cx="0" cy="0"/>
+        </a:xfrm>
+      </p:grpSpPr>
+      <p:sp>
+        <p:nvSpPr>
+          <p:cNvPr id="2" name="Freeform 2"/>
+          <p:cNvSpPr/>
+          <p:nvPr/>
+        </p:nvSpPr>
+        <p:spPr>
+          <a:xfrm>
+            <a:off x="0" y="0"/>
+            <a:ext cx="18288000" cy="10287000"/>
+          </a:xfrm>
+          <a:custGeom>
+            <a:avLst/>
+            <a:gdLst/>
+            <a:ahLst/>
+            <a:cxnLst/>
+            <a:rect l="l" t="t" r="r" b="b"/>
+            <a:pathLst>
+              <a:path w="18288000" h="10287000">
+                <a:moveTo>
+                  <a:pt x="0" y="0"/>
+                </a:moveTo>
+                <a:lnTo>
+                  <a:pt x="18288000" y="0"/>
+                </a:lnTo>
+                <a:lnTo>
+                  <a:pt x="18288000" y="10287000"/>
+                </a:lnTo>
+                <a:lnTo>
+                  <a:pt x="0" y="10287000"/>
+                </a:lnTo>
+                <a:lnTo>
+                  <a:pt x="0" y="0"/>
+                </a:lnTo>
+                <a:close/>
+              </a:path>
+            </a:pathLst>
+          </a:custGeom>
+          <a:blipFill>
+            <a:blip r:embed="rId2">
+              <a:alphaModFix amt="50000"/>
+            </a:blip>
+            <a:stretch>
+              <a:fillRect/>
+            </a:stretch>
+          </a:blipFill>
+        </p:spPr>
+        <p:txBody>
+          <a:bodyPr/>
+          <a:lstStyle/>
+          <a:p>
+            <a:endParaRPr lang="en-US"/>
+          </a:p>
+        </p:txBody>
+      </p:sp>
+      <p:sp>
+        <p:nvSpPr>
+          <p:cNvPr id="3" name="TextBox 3"/>
+          <p:cNvSpPr txBox="1"/>
+          <p:nvPr/>
+        </p:nvSpPr>
+        <p:spPr>
+          <a:xfrm>
+            <a:off x="4485814" y="2762204"/>
+            <a:ext cx="9316373" cy="2453640"/>
+          </a:xfrm>
+          <a:prstGeom prst="rect">
+            <a:avLst/>
+          </a:prstGeom>
+        </p:spPr>
+        <p:txBody>
+          <a:bodyPr lIns="0" tIns="0" rIns="0" bIns="0" rtlCol="0" anchor="t">
+            <a:spAutoFit/>
+          </a:bodyPr>
+          <a:lstStyle/>
+          <a:p>
+            <a:pPr algn="ctr">
+              <a:lnSpc>
+                <a:spcPts val="20160"/>
+              </a:lnSpc>
+            </a:pPr>
+            <a:r>
+              <a:rPr lang="en-US" sz="14400">
+                <a:solidFill>
+                  <a:srgbClr val="000000"/>
+                </a:solidFill>
+                <a:latin typeface="DM Serif Display"/>
+                <a:ea typeface="DM Serif Display"/>
+                <a:cs typeface="DM Serif Display"/>
+                <a:sym typeface="DM Serif Display"/>
+              </a:rPr>
+              <a:t>The End</a:t>
+            </a:r>
+          </a:p>
+        </p:txBody>
+      </p:sp>
+      <p:sp>
+        <p:nvSpPr>
+          <p:cNvPr id="4" name="TextBox 4"/>
+          <p:cNvSpPr txBox="1"/>
+          <p:nvPr/>
+        </p:nvSpPr>
+        <p:spPr>
+          <a:xfrm>
+            <a:off x="4180543" y="5328331"/>
+            <a:ext cx="9926914" cy="405765"/>
+          </a:xfrm>
+          <a:prstGeom prst="rect">
+            <a:avLst/>
+          </a:prstGeom>
+        </p:spPr>
+        <p:txBody>
+          <a:bodyPr lIns="0" tIns="0" rIns="0" bIns="0" rtlCol="0" anchor="t">
+            <a:spAutoFit/>
+          </a:bodyPr>
+          <a:lstStyle/>
+          <a:p>
+            <a:pPr algn="ctr">
+              <a:lnSpc>
+                <a:spcPts val="3359"/>
+              </a:lnSpc>
+              <a:spcBef>
+                <a:spcPct val="0"/>
+              </a:spcBef>
+            </a:pPr>
+            <a:r>
+              <a:rPr lang="en-US" sz="2400" spc="240">
+                <a:solidFill>
+                  <a:srgbClr val="000000"/>
+                </a:solidFill>
+                <a:latin typeface="Open Sauce"/>
+                <a:ea typeface="Open Sauce"/>
+                <a:cs typeface="Open Sauce"/>
+                <a:sym typeface="Open Sauce"/>
+              </a:rPr>
+              <a:t>THANK YOU FOR LISTENING</a:t>
+            </a:r>
+          </a:p>
+        </p:txBody>
+      </p:sp>
+      <p:sp>
+        <p:nvSpPr>
+          <p:cNvPr id="5" name="TextBox 5"/>
+          <p:cNvSpPr txBox="1"/>
+          <p:nvPr/>
+        </p:nvSpPr>
+        <p:spPr>
+          <a:xfrm>
+            <a:off x="7671329" y="8480425"/>
+            <a:ext cx="2945342" cy="553165"/>
+          </a:xfrm>
+          <a:prstGeom prst="rect">
+            <a:avLst/>
+          </a:prstGeom>
+        </p:spPr>
+        <p:txBody>
+          <a:bodyPr lIns="0" tIns="0" rIns="0" bIns="0" rtlCol="0" anchor="t">
+            <a:spAutoFit/>
+          </a:bodyPr>
+          <a:lstStyle/>
+          <a:p>
+            <a:pPr algn="ctr">
+              <a:lnSpc>
+                <a:spcPts val="4480"/>
+              </a:lnSpc>
+              <a:spcBef>
+                <a:spcPct val="0"/>
+              </a:spcBef>
+            </a:pPr>
+            <a:r>
+              <a:rPr lang="en-US" sz="3200" dirty="0">
+                <a:solidFill>
+                  <a:srgbClr val="000000">
+                    <a:alpha val="49804"/>
+                  </a:srgbClr>
+                </a:solidFill>
+                <a:latin typeface="DM Serif Display"/>
+                <a:ea typeface="DM Serif Display"/>
+                <a:cs typeface="DM Serif Display"/>
+                <a:sym typeface="DM Serif Display"/>
+              </a:rPr>
+              <a:t>Thu Ta Zaw</a:t>
+            </a:r>
+          </a:p>
+        </p:txBody>
+      </p:sp>
+      <p:sp>
+        <p:nvSpPr>
+          <p:cNvPr id="6" name="TextBox 6"/>
+          <p:cNvSpPr txBox="1"/>
+          <p:nvPr/>
+        </p:nvSpPr>
+        <p:spPr>
+          <a:xfrm>
+            <a:off x="7418762" y="9142095"/>
+            <a:ext cx="3450476" cy="258725"/>
+          </a:xfrm>
+          <a:prstGeom prst="rect">
+            <a:avLst/>
+          </a:prstGeom>
+        </p:spPr>
+        <p:txBody>
+          <a:bodyPr lIns="0" tIns="0" rIns="0" bIns="0" rtlCol="0" anchor="t">
+            <a:spAutoFit/>
+          </a:bodyPr>
+          <a:lstStyle/>
+          <a:p>
+            <a:pPr lvl="0" algn="ctr">
+              <a:lnSpc>
+                <a:spcPts val="2239"/>
+              </a:lnSpc>
+              <a:spcBef>
+                <a:spcPct val="0"/>
+              </a:spcBef>
+            </a:pPr>
+            <a:r>
+              <a:rPr lang="en-US" sz="1599" spc="159" dirty="0">
+                <a:solidFill>
+                  <a:srgbClr val="000000">
+                    <a:alpha val="49804"/>
+                  </a:srgbClr>
+                </a:solidFill>
+                <a:latin typeface="Open Sauce"/>
+                <a:ea typeface="Open Sauce"/>
+                <a:cs typeface="Open Sauce"/>
+                <a:sym typeface="Open Sauce"/>
+              </a:rPr>
+              <a:t>2415121095</a:t>
+            </a:r>
+            <a:endParaRPr lang="en-US" sz="1599" u="none" strike="noStrike" spc="159" dirty="0">
+              <a:solidFill>
+                <a:srgbClr val="000000">
+                  <a:alpha val="49804"/>
+                </a:srgbClr>
+              </a:solidFill>
+              <a:latin typeface="Open Sauce"/>
+              <a:ea typeface="Open Sauce"/>
+              <a:cs typeface="Open Sauce"/>
+              <a:sym typeface="Open Sauce"/>
+            </a:endParaRPr>
+          </a:p>
+        </p:txBody>
+      </p:sp>
     </p:spTree>
   </p:cSld>
   <p:clrMapOvr>
@@ -8104,8 +9769,8 @@
           </a:p>
         </p:txBody>
       </p:sp>
-      <mc:AlternateContent xmlns:mc="http://schemas.openxmlformats.org/markup-compatibility/2006">
-        <mc:Choice xmlns:a14="http://schemas.microsoft.com/office/drawing/2010/main" Requires="a14">
+      <mc:AlternateContent xmlns:mc="http://schemas.openxmlformats.org/markup-compatibility/2006" xmlns:a14="http://schemas.microsoft.com/office/drawing/2010/main">
+        <mc:Choice Requires="a14">
           <p:sp>
             <p:nvSpPr>
               <p:cNvPr id="8" name="TextBox 8">
@@ -8295,7 +9960,7 @@
             </p:txBody>
           </p:sp>
         </mc:Choice>
-        <mc:Fallback>
+        <mc:Fallback xmlns="">
           <p:sp>
             <p:nvSpPr>
               <p:cNvPr id="8" name="TextBox 8">
@@ -8470,7 +10135,13 @@
   <p:cSld>
     <p:spTree>
       <p:nvGrpSpPr>
-        <p:cNvPr id="1" name=""/>
+        <p:cNvPr id="1" name="">
+          <a:extLst>
+            <a:ext uri="{FF2B5EF4-FFF2-40B4-BE49-F238E27FC236}">
+              <a16:creationId xmlns:a16="http://schemas.microsoft.com/office/drawing/2014/main" id="{DEFAC9F4-1EE3-8E98-F64B-5BE530B1707B}"/>
+            </a:ext>
+          </a:extLst>
+        </p:cNvPr>
         <p:cNvGrpSpPr/>
         <p:nvPr/>
       </p:nvGrpSpPr>
@@ -8484,13 +10155,19 @@
       </p:grpSpPr>
       <p:sp>
         <p:nvSpPr>
-          <p:cNvPr id="2" name="Freeform 2"/>
+          <p:cNvPr id="2" name="Freeform 2">
+            <a:extLst>
+              <a:ext uri="{FF2B5EF4-FFF2-40B4-BE49-F238E27FC236}">
+                <a16:creationId xmlns:a16="http://schemas.microsoft.com/office/drawing/2014/main" id="{CFCD397F-B98E-3BBE-8E2B-F155795AB067}"/>
+              </a:ext>
+            </a:extLst>
+          </p:cNvPr>
           <p:cNvSpPr/>
           <p:nvPr/>
         </p:nvSpPr>
         <p:spPr>
           <a:xfrm>
-            <a:off x="0" y="0"/>
+            <a:off x="-1" y="0"/>
             <a:ext cx="18288000" cy="10287000"/>
           </a:xfrm>
           <a:custGeom>
@@ -8521,211 +10198,241 @@
             </a:pathLst>
           </a:custGeom>
           <a:blipFill>
-            <a:blip r:embed="rId2">
+            <a:blip r:embed="rId3">
               <a:alphaModFix amt="50000"/>
             </a:blip>
             <a:stretch>
               <a:fillRect/>
             </a:stretch>
           </a:blipFill>
+          <a:ln cap="sq">
+            <a:noFill/>
+            <a:prstDash val="solid"/>
+            <a:miter/>
+          </a:ln>
         </p:spPr>
         <p:txBody>
           <a:bodyPr/>
           <a:lstStyle/>
           <a:p>
-            <a:endParaRPr lang="en-US"/>
-          </a:p>
-        </p:txBody>
-      </p:sp>
-      <p:sp>
-        <p:nvSpPr>
-          <p:cNvPr id="3" name="TextBox 3"/>
+            <a:endParaRPr lang="en-US" dirty="0"/>
+          </a:p>
+        </p:txBody>
+      </p:sp>
+      <p:sp>
+        <p:nvSpPr>
+          <p:cNvPr id="3" name="AutoShape 3">
+            <a:extLst>
+              <a:ext uri="{FF2B5EF4-FFF2-40B4-BE49-F238E27FC236}">
+                <a16:creationId xmlns:a16="http://schemas.microsoft.com/office/drawing/2014/main" id="{6B8DD5FB-BBE3-B1C8-F7FB-644E2B250225}"/>
+              </a:ext>
+            </a:extLst>
+          </p:cNvPr>
+          <p:cNvSpPr/>
+          <p:nvPr/>
+        </p:nvSpPr>
+        <p:spPr>
+          <a:xfrm>
+            <a:off x="1166399" y="1028700"/>
+            <a:ext cx="687324" cy="0"/>
+          </a:xfrm>
+          <a:prstGeom prst="line">
+            <a:avLst/>
+          </a:prstGeom>
+          <a:ln w="76200" cap="flat">
+            <a:solidFill>
+              <a:srgbClr val="000000"/>
+            </a:solidFill>
+            <a:prstDash val="solid"/>
+            <a:headEnd type="none" w="sm" len="sm"/>
+            <a:tailEnd type="none" w="sm" len="sm"/>
+          </a:ln>
+        </p:spPr>
+        <p:txBody>
+          <a:bodyPr/>
+          <a:lstStyle/>
+          <a:p>
+            <a:endParaRPr lang="en-US" dirty="0"/>
+          </a:p>
+        </p:txBody>
+      </p:sp>
+      <p:sp>
+        <p:nvSpPr>
+          <p:cNvPr id="8" name="TextBox 8">
+            <a:extLst>
+              <a:ext uri="{FF2B5EF4-FFF2-40B4-BE49-F238E27FC236}">
+                <a16:creationId xmlns:a16="http://schemas.microsoft.com/office/drawing/2014/main" id="{4AB3A4DF-7AB1-BE96-AF5E-32BF0FDA2B6B}"/>
+              </a:ext>
+            </a:extLst>
+          </p:cNvPr>
           <p:cNvSpPr txBox="1"/>
           <p:nvPr/>
         </p:nvSpPr>
         <p:spPr>
           <a:xfrm>
-            <a:off x="4485814" y="2762204"/>
-            <a:ext cx="9316373" cy="2453640"/>
+            <a:off x="755816" y="2628122"/>
+            <a:ext cx="16541583" cy="7189019"/>
           </a:xfrm>
           <a:prstGeom prst="rect">
             <a:avLst/>
           </a:prstGeom>
         </p:spPr>
         <p:txBody>
-          <a:bodyPr lIns="0" tIns="0" rIns="0" bIns="0" rtlCol="0" anchor="t">
+          <a:bodyPr wrap="square" lIns="0" tIns="0" rIns="0" bIns="0" rtlCol="0" anchor="t">
             <a:spAutoFit/>
           </a:bodyPr>
           <a:lstStyle/>
           <a:p>
-            <a:pPr algn="ctr">
+            <a:pPr marL="302259" lvl="1">
               <a:lnSpc>
-                <a:spcPts val="20160"/>
+                <a:spcPts val="4479"/>
               </a:lnSpc>
             </a:pPr>
             <a:r>
-              <a:rPr lang="en-US" sz="14400">
+              <a:rPr lang="en-US" sz="3600" b="1" dirty="0">
                 <a:solidFill>
                   <a:srgbClr val="000000"/>
                 </a:solidFill>
-                <a:latin typeface="DM Serif Display"/>
-                <a:ea typeface="DM Serif Display"/>
-                <a:cs typeface="DM Serif Display"/>
-                <a:sym typeface="DM Serif Display"/>
+                <a:latin typeface="Times New Roman" panose="02020603050405020304" pitchFamily="18" charset="0"/>
+                <a:cs typeface="Times New Roman" panose="02020603050405020304" pitchFamily="18" charset="0"/>
+                <a:sym typeface="Open Sauce"/>
               </a:rPr>
-              <a:t>The End</a:t>
-            </a:r>
-          </a:p>
-        </p:txBody>
-      </p:sp>
-      <p:sp>
-        <p:nvSpPr>
-          <p:cNvPr id="4" name="TextBox 4"/>
+              <a:t>Optical Property-Based Selection of Human Bone Phantoms at 850 nm Using Integrating Sphere Measurements and the Inverse Adding-Doubling Method</a:t>
+            </a:r>
+            <a:r>
+              <a:rPr lang="en-US" sz="4000" b="1" dirty="0">
+                <a:solidFill>
+                  <a:srgbClr val="000000"/>
+                </a:solidFill>
+                <a:latin typeface="Times New Roman" panose="02020603050405020304" pitchFamily="18" charset="0"/>
+                <a:cs typeface="Times New Roman" panose="02020603050405020304" pitchFamily="18" charset="0"/>
+                <a:sym typeface="Open Sauce"/>
+              </a:rPr>
+              <a:t>. </a:t>
+            </a:r>
+            <a:endParaRPr lang="en-US" sz="2500" b="1" dirty="0"/>
+          </a:p>
+          <a:p>
+            <a:pPr marL="604519" lvl="1" indent="-302260">
+              <a:lnSpc>
+                <a:spcPct val="200000"/>
+              </a:lnSpc>
+              <a:buFont typeface="Arial"/>
+              <a:buChar char="•"/>
+            </a:pPr>
+            <a:r>
+              <a:rPr lang="en-US" sz="3200" b="1" dirty="0"/>
+              <a:t>Aims and objectives</a:t>
+            </a:r>
+          </a:p>
+          <a:p>
+            <a:pPr marL="1061719" lvl="2" indent="-302260">
+              <a:lnSpc>
+                <a:spcPct val="200000"/>
+              </a:lnSpc>
+              <a:buFont typeface="Arial"/>
+              <a:buChar char="•"/>
+            </a:pPr>
+            <a:r>
+              <a:rPr lang="en-US" sz="2800" dirty="0"/>
+              <a:t>To experimentally acquire diffuse reflectance and transmittance data of PDMS-based bone phantoms at 850 nm using an integrating sphere. </a:t>
+            </a:r>
+          </a:p>
+          <a:p>
+            <a:pPr marL="1061719" lvl="2" indent="-302260">
+              <a:lnSpc>
+                <a:spcPct val="200000"/>
+              </a:lnSpc>
+              <a:buFont typeface="Arial"/>
+              <a:buChar char="•"/>
+            </a:pPr>
+            <a:r>
+              <a:rPr lang="en-US" sz="2800" dirty="0"/>
+              <a:t>To extract intrinsic optical parameters (μₐ and μₛ′) via Inverse Adding-Doubling inversion.</a:t>
+            </a:r>
+          </a:p>
+          <a:p>
+            <a:pPr marL="1061719" lvl="2" indent="-302260">
+              <a:lnSpc>
+                <a:spcPct val="200000"/>
+              </a:lnSpc>
+              <a:buFont typeface="Arial"/>
+              <a:buChar char="•"/>
+            </a:pPr>
+            <a:r>
+              <a:rPr lang="en-US" sz="2800" dirty="0"/>
+              <a:t>To establish an optical matching criterion by quantitatively comparing phantom parameters with human leg bone optical properties.</a:t>
+            </a:r>
+          </a:p>
+          <a:p>
+            <a:pPr marL="1061719" lvl="2" indent="-302260">
+              <a:lnSpc>
+                <a:spcPct val="200000"/>
+              </a:lnSpc>
+              <a:buFont typeface="Arial"/>
+              <a:buChar char="•"/>
+            </a:pPr>
+            <a:r>
+              <a:rPr lang="en-US" sz="2800" dirty="0"/>
+              <a:t>To select the most optically equivalent phantom for subsequent biomedical optical applications.</a:t>
+            </a:r>
+            <a:endParaRPr lang="en-US" sz="2500" dirty="0"/>
+          </a:p>
+        </p:txBody>
+      </p:sp>
+      <p:sp>
+        <p:nvSpPr>
+          <p:cNvPr id="4" name="TextBox 8">
+            <a:extLst>
+              <a:ext uri="{FF2B5EF4-FFF2-40B4-BE49-F238E27FC236}">
+                <a16:creationId xmlns:a16="http://schemas.microsoft.com/office/drawing/2014/main" id="{14FB2EED-E4AB-D12C-FBF5-0A959E93FF2C}"/>
+              </a:ext>
+            </a:extLst>
+          </p:cNvPr>
           <p:cNvSpPr txBox="1"/>
           <p:nvPr/>
         </p:nvSpPr>
         <p:spPr>
           <a:xfrm>
-            <a:off x="4180543" y="5328331"/>
-            <a:ext cx="9926914" cy="405765"/>
+            <a:off x="7111200" y="1583943"/>
+            <a:ext cx="4065599" cy="613181"/>
           </a:xfrm>
           <a:prstGeom prst="rect">
             <a:avLst/>
           </a:prstGeom>
         </p:spPr>
         <p:txBody>
-          <a:bodyPr lIns="0" tIns="0" rIns="0" bIns="0" rtlCol="0" anchor="t">
+          <a:bodyPr wrap="square" lIns="0" tIns="0" rIns="0" bIns="0" rtlCol="0" anchor="t">
             <a:spAutoFit/>
           </a:bodyPr>
           <a:lstStyle/>
           <a:p>
-            <a:pPr algn="ctr">
+            <a:pPr marL="302259" lvl="1">
               <a:lnSpc>
-                <a:spcPts val="3359"/>
+                <a:spcPts val="4479"/>
               </a:lnSpc>
-              <a:spcBef>
-                <a:spcPct val="0"/>
-              </a:spcBef>
             </a:pPr>
             <a:r>
-              <a:rPr lang="en-US" sz="2400" spc="240">
+              <a:rPr lang="en-US" sz="6000" b="1" dirty="0">
                 <a:solidFill>
                   <a:srgbClr val="000000"/>
                 </a:solidFill>
-                <a:latin typeface="Open Sauce"/>
+                <a:latin typeface="Times New Roman" panose="02020603050405020304" pitchFamily="18" charset="0"/>
                 <a:ea typeface="Open Sauce"/>
-                <a:cs typeface="Open Sauce"/>
+                <a:cs typeface="Times New Roman" panose="02020603050405020304" pitchFamily="18" charset="0"/>
                 <a:sym typeface="Open Sauce"/>
               </a:rPr>
-              <a:t>THANK YOU FOR LISTENING</a:t>
-            </a:r>
-          </a:p>
-        </p:txBody>
-      </p:sp>
-      <p:sp>
-        <p:nvSpPr>
-          <p:cNvPr id="5" name="TextBox 5"/>
-          <p:cNvSpPr txBox="1"/>
-          <p:nvPr/>
-        </p:nvSpPr>
-        <p:spPr>
-          <a:xfrm>
-            <a:off x="7671329" y="8480425"/>
-            <a:ext cx="2945342" cy="553165"/>
-          </a:xfrm>
-          <a:prstGeom prst="rect">
-            <a:avLst/>
-          </a:prstGeom>
-        </p:spPr>
-        <p:txBody>
-          <a:bodyPr lIns="0" tIns="0" rIns="0" bIns="0" rtlCol="0" anchor="t">
-            <a:spAutoFit/>
-          </a:bodyPr>
-          <a:lstStyle/>
-          <a:p>
-            <a:pPr algn="ctr">
-              <a:lnSpc>
-                <a:spcPts val="4480"/>
-              </a:lnSpc>
-              <a:spcBef>
-                <a:spcPct val="0"/>
-              </a:spcBef>
-            </a:pPr>
-            <a:r>
-              <a:rPr lang="en-US" sz="3200" dirty="0">
-                <a:solidFill>
-                  <a:srgbClr val="000000">
-                    <a:alpha val="49804"/>
-                  </a:srgbClr>
-                </a:solidFill>
-                <a:latin typeface="DM Serif Display"/>
-                <a:ea typeface="DM Serif Display"/>
-                <a:cs typeface="DM Serif Display"/>
-                <a:sym typeface="DM Serif Display"/>
-              </a:rPr>
-              <a:t>Thu Ta Zaw</a:t>
-            </a:r>
-          </a:p>
-        </p:txBody>
-      </p:sp>
-      <p:sp>
-        <p:nvSpPr>
-          <p:cNvPr id="6" name="TextBox 6"/>
-          <p:cNvSpPr txBox="1"/>
-          <p:nvPr/>
-        </p:nvSpPr>
-        <p:spPr>
-          <a:xfrm>
-            <a:off x="7418762" y="9142095"/>
-            <a:ext cx="3450476" cy="258725"/>
-          </a:xfrm>
-          <a:prstGeom prst="rect">
-            <a:avLst/>
-          </a:prstGeom>
-        </p:spPr>
-        <p:txBody>
-          <a:bodyPr lIns="0" tIns="0" rIns="0" bIns="0" rtlCol="0" anchor="t">
-            <a:spAutoFit/>
-          </a:bodyPr>
-          <a:lstStyle/>
-          <a:p>
-            <a:pPr lvl="0" algn="ctr">
-              <a:lnSpc>
-                <a:spcPts val="2239"/>
-              </a:lnSpc>
-              <a:spcBef>
-                <a:spcPct val="0"/>
-              </a:spcBef>
-            </a:pPr>
-            <a:r>
-              <a:rPr lang="en-US" sz="1599" spc="159" dirty="0">
-                <a:solidFill>
-                  <a:srgbClr val="000000">
-                    <a:alpha val="49804"/>
-                  </a:srgbClr>
-                </a:solidFill>
-                <a:latin typeface="Open Sauce"/>
-                <a:ea typeface="Open Sauce"/>
-                <a:cs typeface="Open Sauce"/>
-                <a:sym typeface="Open Sauce"/>
-              </a:rPr>
-              <a:t>2415121095</a:t>
-            </a:r>
-            <a:endParaRPr lang="en-US" sz="1599" u="none" strike="noStrike" spc="159" dirty="0">
-              <a:solidFill>
-                <a:srgbClr val="000000">
-                  <a:alpha val="49804"/>
-                </a:srgbClr>
-              </a:solidFill>
-              <a:latin typeface="Open Sauce"/>
-              <a:ea typeface="Open Sauce"/>
-              <a:cs typeface="Open Sauce"/>
-              <a:sym typeface="Open Sauce"/>
-            </a:endParaRPr>
+              <a:t>Thesis Title</a:t>
+            </a:r>
           </a:p>
         </p:txBody>
       </p:sp>
     </p:spTree>
+    <p:extLst>
+      <p:ext uri="{BB962C8B-B14F-4D97-AF65-F5344CB8AC3E}">
+        <p14:creationId xmlns:p14="http://schemas.microsoft.com/office/powerpoint/2010/main" val="1638907280"/>
+      </p:ext>
+    </p:extLst>
   </p:cSld>
   <p:clrMapOvr>
     <a:masterClrMapping/>

--- a/Japan/Progress Presentation/Presentation 12.1.pptx
+++ b/Japan/Progress Presentation/Presentation 12.1.pptx
@@ -235,7 +235,7 @@
           <a:p>
             <a:fld id="{4E2EF82B-E016-44BD-B0C4-D5A3DF34FAF9}" type="datetimeFigureOut">
               <a:rPr lang="en-US" smtClean="0"/>
-              <a:t>2/16/2026</a:t>
+              <a:t>3/2/2026</a:t>
             </a:fld>
             <a:endParaRPr lang="en-US"/>
           </a:p>
@@ -1488,6 +1488,24 @@
           <a:bodyPr/>
           <a:lstStyle/>
           <a:p>
+            <a:r>
+              <a:rPr lang="en-US" dirty="0"/>
+              <a:t>Bone powder composite material </a:t>
+            </a:r>
+          </a:p>
+          <a:p>
+            <a:endParaRPr lang="en-US" dirty="0"/>
+          </a:p>
+          <a:p>
+            <a:r>
+              <a:rPr lang="en-US" dirty="0"/>
+              <a:t>PLA bone phantom</a:t>
+            </a:r>
+          </a:p>
+          <a:p>
+            <a:endParaRPr lang="en-US" dirty="0"/>
+          </a:p>
+          <a:p>
             <a:endParaRPr lang="en-US" dirty="0"/>
           </a:p>
         </p:txBody>
@@ -1822,7 +1840,7 @@
             <a:fld id="{1D8BD707-D9CF-40AE-B4C6-C98DA3205C09}" type="datetimeFigureOut">
               <a:rPr lang="en-US" smtClean="0"/>
               <a:pPr/>
-              <a:t>2/16/2026</a:t>
+              <a:t>3/2/2026</a:t>
             </a:fld>
             <a:endParaRPr lang="en-US"/>
           </a:p>
@@ -1987,7 +2005,7 @@
             <a:fld id="{1D8BD707-D9CF-40AE-B4C6-C98DA3205C09}" type="datetimeFigureOut">
               <a:rPr lang="en-US" smtClean="0"/>
               <a:pPr/>
-              <a:t>2/16/2026</a:t>
+              <a:t>3/2/2026</a:t>
             </a:fld>
             <a:endParaRPr lang="en-US"/>
           </a:p>
@@ -2162,7 +2180,7 @@
             <a:fld id="{1D8BD707-D9CF-40AE-B4C6-C98DA3205C09}" type="datetimeFigureOut">
               <a:rPr lang="en-US" smtClean="0"/>
               <a:pPr/>
-              <a:t>2/16/2026</a:t>
+              <a:t>3/2/2026</a:t>
             </a:fld>
             <a:endParaRPr lang="en-US"/>
           </a:p>
@@ -2327,7 +2345,7 @@
             <a:fld id="{1D8BD707-D9CF-40AE-B4C6-C98DA3205C09}" type="datetimeFigureOut">
               <a:rPr lang="en-US" smtClean="0"/>
               <a:pPr/>
-              <a:t>2/16/2026</a:t>
+              <a:t>3/2/2026</a:t>
             </a:fld>
             <a:endParaRPr lang="en-US"/>
           </a:p>
@@ -2569,7 +2587,7 @@
             <a:fld id="{1D8BD707-D9CF-40AE-B4C6-C98DA3205C09}" type="datetimeFigureOut">
               <a:rPr lang="en-US" smtClean="0"/>
               <a:pPr/>
-              <a:t>2/16/2026</a:t>
+              <a:t>3/2/2026</a:t>
             </a:fld>
             <a:endParaRPr lang="en-US"/>
           </a:p>
@@ -2851,7 +2869,7 @@
             <a:fld id="{1D8BD707-D9CF-40AE-B4C6-C98DA3205C09}" type="datetimeFigureOut">
               <a:rPr lang="en-US" smtClean="0"/>
               <a:pPr/>
-              <a:t>2/16/2026</a:t>
+              <a:t>3/2/2026</a:t>
             </a:fld>
             <a:endParaRPr lang="en-US"/>
           </a:p>
@@ -3267,7 +3285,7 @@
             <a:fld id="{1D8BD707-D9CF-40AE-B4C6-C98DA3205C09}" type="datetimeFigureOut">
               <a:rPr lang="en-US" smtClean="0"/>
               <a:pPr/>
-              <a:t>2/16/2026</a:t>
+              <a:t>3/2/2026</a:t>
             </a:fld>
             <a:endParaRPr lang="en-US"/>
           </a:p>
@@ -3381,7 +3399,7 @@
             <a:fld id="{1D8BD707-D9CF-40AE-B4C6-C98DA3205C09}" type="datetimeFigureOut">
               <a:rPr lang="en-US" smtClean="0"/>
               <a:pPr/>
-              <a:t>2/16/2026</a:t>
+              <a:t>3/2/2026</a:t>
             </a:fld>
             <a:endParaRPr lang="en-US"/>
           </a:p>
@@ -3473,7 +3491,7 @@
             <a:fld id="{1D8BD707-D9CF-40AE-B4C6-C98DA3205C09}" type="datetimeFigureOut">
               <a:rPr lang="en-US" smtClean="0"/>
               <a:pPr/>
-              <a:t>2/16/2026</a:t>
+              <a:t>3/2/2026</a:t>
             </a:fld>
             <a:endParaRPr lang="en-US"/>
           </a:p>
@@ -3745,7 +3763,7 @@
             <a:fld id="{1D8BD707-D9CF-40AE-B4C6-C98DA3205C09}" type="datetimeFigureOut">
               <a:rPr lang="en-US" smtClean="0"/>
               <a:pPr/>
-              <a:t>2/16/2026</a:t>
+              <a:t>3/2/2026</a:t>
             </a:fld>
             <a:endParaRPr lang="en-US"/>
           </a:p>
@@ -3994,7 +4012,7 @@
             <a:fld id="{1D8BD707-D9CF-40AE-B4C6-C98DA3205C09}" type="datetimeFigureOut">
               <a:rPr lang="en-US" smtClean="0"/>
               <a:pPr/>
-              <a:t>2/16/2026</a:t>
+              <a:t>3/2/2026</a:t>
             </a:fld>
             <a:endParaRPr lang="en-US"/>
           </a:p>
@@ -4202,7 +4220,7 @@
             <a:fld id="{1D8BD707-D9CF-40AE-B4C6-C98DA3205C09}" type="datetimeFigureOut">
               <a:rPr lang="en-US" smtClean="0"/>
               <a:pPr/>
-              <a:t>2/16/2026</a:t>
+              <a:t>3/2/2026</a:t>
             </a:fld>
             <a:endParaRPr lang="en-US"/>
           </a:p>
@@ -5495,7 +5513,7 @@
             </a:pPr>
             <a:r>
               <a:rPr lang="en-US" sz="2800" dirty="0"/>
-              <a:t>To select the suitable PDMS-based bone phantoms for the human bone optical studies. </a:t>
+              <a:t>To select the suitable bone phantoms for the human bone optical studies. </a:t>
             </a:r>
           </a:p>
         </p:txBody>
@@ -5782,7 +5800,15 @@
             </a:pPr>
             <a:r>
               <a:rPr lang="en-US" sz="2800" b="1" dirty="0"/>
-              <a:t>Enables the development of optically equivalent PDMS-based bone phantoms</a:t>
+              <a:t>Enables the development of </a:t>
+            </a:r>
+            <a:r>
+              <a:rPr lang="en-US" sz="2800" b="1"/>
+              <a:t>optically equivalent bone </a:t>
+            </a:r>
+            <a:r>
+              <a:rPr lang="en-US" sz="2800" b="1" dirty="0"/>
+              <a:t>phantoms</a:t>
             </a:r>
             <a:r>
               <a:rPr lang="en-US" sz="2800" dirty="0"/>
@@ -8039,15 +8065,7 @@
             </a:pPr>
             <a:r>
               <a:rPr lang="en-US" sz="2500" dirty="0"/>
-              <a:t>Quantitatively determined the absorption and reduced scattering coefficient of human cranial cortical bone over 800-2000 nm, using spectrophotometer with integrating sphere to measure the reflectance and transmittance and IAD method to calculate the </a:t>
-            </a:r>
-            <a:r>
-              <a:rPr lang="en-US" sz="2500" dirty="0" err="1"/>
-              <a:t>absortpion</a:t>
-            </a:r>
-            <a:r>
-              <a:rPr lang="en-US" sz="2500" dirty="0"/>
-              <a:t> and reduced scattering coefficients.</a:t>
+              <a:t>Quantitatively determined the absorption and reduced scattering coefficient of human cranial cortical bone over 800-2000 nm, using spectrophotometer with integrating sphere to measure the reflectance and transmittance and IAD method to calculate the absorption and reduced scattering coefficients.</a:t>
             </a:r>
           </a:p>
           <a:p>
@@ -10335,7 +10353,7 @@
             </a:pPr>
             <a:r>
               <a:rPr lang="en-US" sz="2800" dirty="0"/>
-              <a:t>To experimentally acquire diffuse reflectance and transmittance data of PDMS-based bone phantoms at 850 nm using an integrating sphere. </a:t>
+              <a:t>To experimentally acquire diffuse reflectance and transmittance data of bone phantoms at 850 nm using an integrating sphere. </a:t>
             </a:r>
           </a:p>
           <a:p>

--- a/Japan/Progress Presentation/Presentation 12.1.pptx
+++ b/Japan/Progress Presentation/Presentation 12.1.pptx
@@ -235,7 +235,7 @@
           <a:p>
             <a:fld id="{4E2EF82B-E016-44BD-B0C4-D5A3DF34FAF9}" type="datetimeFigureOut">
               <a:rPr lang="en-US" smtClean="0"/>
-              <a:t>3/2/2026</a:t>
+              <a:t>4/6/2026</a:t>
             </a:fld>
             <a:endParaRPr lang="en-US"/>
           </a:p>
@@ -1840,7 +1840,7 @@
             <a:fld id="{1D8BD707-D9CF-40AE-B4C6-C98DA3205C09}" type="datetimeFigureOut">
               <a:rPr lang="en-US" smtClean="0"/>
               <a:pPr/>
-              <a:t>3/2/2026</a:t>
+              <a:t>4/6/2026</a:t>
             </a:fld>
             <a:endParaRPr lang="en-US"/>
           </a:p>
@@ -2005,7 +2005,7 @@
             <a:fld id="{1D8BD707-D9CF-40AE-B4C6-C98DA3205C09}" type="datetimeFigureOut">
               <a:rPr lang="en-US" smtClean="0"/>
               <a:pPr/>
-              <a:t>3/2/2026</a:t>
+              <a:t>4/6/2026</a:t>
             </a:fld>
             <a:endParaRPr lang="en-US"/>
           </a:p>
@@ -2180,7 +2180,7 @@
             <a:fld id="{1D8BD707-D9CF-40AE-B4C6-C98DA3205C09}" type="datetimeFigureOut">
               <a:rPr lang="en-US" smtClean="0"/>
               <a:pPr/>
-              <a:t>3/2/2026</a:t>
+              <a:t>4/6/2026</a:t>
             </a:fld>
             <a:endParaRPr lang="en-US"/>
           </a:p>
@@ -2345,7 +2345,7 @@
             <a:fld id="{1D8BD707-D9CF-40AE-B4C6-C98DA3205C09}" type="datetimeFigureOut">
               <a:rPr lang="en-US" smtClean="0"/>
               <a:pPr/>
-              <a:t>3/2/2026</a:t>
+              <a:t>4/6/2026</a:t>
             </a:fld>
             <a:endParaRPr lang="en-US"/>
           </a:p>
@@ -2587,7 +2587,7 @@
             <a:fld id="{1D8BD707-D9CF-40AE-B4C6-C98DA3205C09}" type="datetimeFigureOut">
               <a:rPr lang="en-US" smtClean="0"/>
               <a:pPr/>
-              <a:t>3/2/2026</a:t>
+              <a:t>4/6/2026</a:t>
             </a:fld>
             <a:endParaRPr lang="en-US"/>
           </a:p>
@@ -2869,7 +2869,7 @@
             <a:fld id="{1D8BD707-D9CF-40AE-B4C6-C98DA3205C09}" type="datetimeFigureOut">
               <a:rPr lang="en-US" smtClean="0"/>
               <a:pPr/>
-              <a:t>3/2/2026</a:t>
+              <a:t>4/6/2026</a:t>
             </a:fld>
             <a:endParaRPr lang="en-US"/>
           </a:p>
@@ -3285,7 +3285,7 @@
             <a:fld id="{1D8BD707-D9CF-40AE-B4C6-C98DA3205C09}" type="datetimeFigureOut">
               <a:rPr lang="en-US" smtClean="0"/>
               <a:pPr/>
-              <a:t>3/2/2026</a:t>
+              <a:t>4/6/2026</a:t>
             </a:fld>
             <a:endParaRPr lang="en-US"/>
           </a:p>
@@ -3399,7 +3399,7 @@
             <a:fld id="{1D8BD707-D9CF-40AE-B4C6-C98DA3205C09}" type="datetimeFigureOut">
               <a:rPr lang="en-US" smtClean="0"/>
               <a:pPr/>
-              <a:t>3/2/2026</a:t>
+              <a:t>4/6/2026</a:t>
             </a:fld>
             <a:endParaRPr lang="en-US"/>
           </a:p>
@@ -3491,7 +3491,7 @@
             <a:fld id="{1D8BD707-D9CF-40AE-B4C6-C98DA3205C09}" type="datetimeFigureOut">
               <a:rPr lang="en-US" smtClean="0"/>
               <a:pPr/>
-              <a:t>3/2/2026</a:t>
+              <a:t>4/6/2026</a:t>
             </a:fld>
             <a:endParaRPr lang="en-US"/>
           </a:p>
@@ -3763,7 +3763,7 @@
             <a:fld id="{1D8BD707-D9CF-40AE-B4C6-C98DA3205C09}" type="datetimeFigureOut">
               <a:rPr lang="en-US" smtClean="0"/>
               <a:pPr/>
-              <a:t>3/2/2026</a:t>
+              <a:t>4/6/2026</a:t>
             </a:fld>
             <a:endParaRPr lang="en-US"/>
           </a:p>
@@ -4012,7 +4012,7 @@
             <a:fld id="{1D8BD707-D9CF-40AE-B4C6-C98DA3205C09}" type="datetimeFigureOut">
               <a:rPr lang="en-US" smtClean="0"/>
               <a:pPr/>
-              <a:t>3/2/2026</a:t>
+              <a:t>4/6/2026</a:t>
             </a:fld>
             <a:endParaRPr lang="en-US"/>
           </a:p>
@@ -4220,7 +4220,7 @@
             <a:fld id="{1D8BD707-D9CF-40AE-B4C6-C98DA3205C09}" type="datetimeFigureOut">
               <a:rPr lang="en-US" smtClean="0"/>
               <a:pPr/>
-              <a:t>3/2/2026</a:t>
+              <a:t>4/6/2026</a:t>
             </a:fld>
             <a:endParaRPr lang="en-US"/>
           </a:p>
@@ -9455,7 +9455,7 @@
                 <a:cs typeface="Times New Roman" panose="02020603050405020304" pitchFamily="18" charset="0"/>
                 <a:sym typeface="Open Sauce"/>
               </a:rPr>
-              <a:t>Measurement of optical properties of</a:t>
+              <a:t>Measurement of optical properties of bone</a:t>
             </a:r>
           </a:p>
           <a:p>
